--- a/SimReal-BP-v29-EN.pptx
+++ b/SimReal-BP-v29-EN.pptx
@@ -10290,7 +10290,7 @@
         <p:spPr>
           <a:xfrm>
             <a:off x="548640" y="4882896"/>
-            <a:ext cx="3544824" cy="1024128"/>
+            <a:ext cx="3544824" cy="1152144"/>
           </a:xfrm>
           <a:prstGeom prst="rect">
             <a:avLst/>
@@ -10440,7 +10440,7 @@
         <p:spPr>
           <a:xfrm>
             <a:off x="4322064" y="4882896"/>
-            <a:ext cx="3544824" cy="1024128"/>
+            <a:ext cx="3544824" cy="1152144"/>
           </a:xfrm>
           <a:prstGeom prst="rect">
             <a:avLst/>
@@ -10590,7 +10590,7 @@
         <p:spPr>
           <a:xfrm>
             <a:off x="8095488" y="4882896"/>
-            <a:ext cx="3544824" cy="1024128"/>
+            <a:ext cx="3544824" cy="1152144"/>
           </a:xfrm>
           <a:prstGeom prst="rect">
             <a:avLst/>
@@ -10726,7 +10726,30 @@
                 <a:cs typeface="Instrument Sans"/>
                 <a:sym typeface="Instrument Sans"/>
               </a:rPr>
-              <a:t>Agent developers pay to practice; private by default</a:t>
+              <a:t>Agents pay to practice, private by default,</a:t>
+            </a:r>
+          </a:p>
+          <a:p>
+            <a:pPr marL="0" marR="0" lvl="0" indent="0" algn="l" rtl="0">
+              <a:spcBef>
+                <a:spcPts val="200"/>
+              </a:spcBef>
+              <a:spcAft>
+                <a:spcPts val="0"/>
+              </a:spcAft>
+              <a:buNone/>
+            </a:pPr>
+            <a:r>
+              <a:rPr lang="en-US" sz="1000" b="0" i="0" u="none" strike="noStrike" cap="none">
+                <a:solidFill>
+                  <a:srgbClr val="33322F"/>
+                </a:solidFill>
+                <a:latin typeface="Instrument Sans"/>
+                <a:ea typeface="Instrument Sans"/>
+                <a:cs typeface="Instrument Sans"/>
+                <a:sym typeface="Instrument Sans"/>
+              </a:rPr>
+              <a:t>or share de-identified runs for credits and a cut</a:t>
             </a:r>
           </a:p>
         </p:txBody>
@@ -30366,7 +30389,7 @@
                 <a:cs typeface="Newsreader"/>
                 <a:sym typeface="Newsreader"/>
               </a:rPr>
-              <a:t>Next · Personal agents</a:t>
+              <a:t>Personal agents</a:t>
             </a:r>
           </a:p>
         </p:txBody>
@@ -30476,7 +30499,7 @@
                 <a:cs typeface="IBM Plex Mono"/>
                 <a:sym typeface="IBM Plex Mono"/>
               </a:rPr>
-              <a:t>September 2026: the personal-agent race is on</a:t>
+              <a:t>Personal agents are here</a:t>
             </a:r>
           </a:p>
         </p:txBody>
@@ -30518,8 +30541,8 @@
         </p:nvSpPr>
         <p:spPr>
           <a:xfrm>
-            <a:off x="548640" y="1865376"/>
-            <a:ext cx="2567178" cy="201168"/>
+            <a:off x="548640" y="1883664"/>
+            <a:ext cx="2567178" cy="658368"/>
           </a:xfrm>
           <a:prstGeom prst="rect">
             <a:avLst/>
@@ -30545,7 +30568,524 @@
               <a:buNone/>
             </a:pPr>
             <a:r>
-              <a:rPr lang="en-US" sz="950" b="0" i="0" u="none" strike="noStrike" cap="none">
+              <a:rPr lang="en-US" sz="4000" b="0" i="0" u="none" strike="noStrike" cap="none">
+                <a:solidFill>
+                  <a:srgbClr val="111110"/>
+                </a:solidFill>
+                <a:latin typeface="Newsreader"/>
+                <a:ea typeface="Newsreader"/>
+                <a:cs typeface="Newsreader"/>
+                <a:sym typeface="Newsreader"/>
+              </a:rPr>
+              <a:t>Muse</a:t>
+            </a:r>
+          </a:p>
+        </p:txBody>
+      </p:sp>
+      <p:sp>
+        <p:nvSpPr>
+          <p:cNvPr id="5008" name="SimReal 5008"/>
+          <p:cNvSpPr txBox="1"/>
+          <p:nvPr/>
+        </p:nvSpPr>
+        <p:spPr>
+          <a:xfrm>
+            <a:off x="548640" y="2596896"/>
+            <a:ext cx="2567178" cy="457200"/>
+          </a:xfrm>
+          <a:prstGeom prst="rect">
+            <a:avLst/>
+          </a:prstGeom>
+          <a:noFill/>
+          <a:ln>
+            <a:noFill/>
+          </a:ln>
+        </p:spPr>
+        <p:txBody>
+          <a:bodyPr spcFirstLastPara="1" wrap="square" lIns="0" tIns="0" rIns="0" bIns="0" anchor="t" anchorCtr="0">
+            <a:noAutofit/>
+          </a:bodyPr>
+          <a:lstStyle/>
+          <a:p>
+            <a:pPr marL="0" marR="0" lvl="0" indent="0" algn="l" rtl="0">
+              <a:lnSpc>
+                <a:spcPct val="110000"/>
+              </a:lnSpc>
+              <a:spcBef>
+                <a:spcPts val="0"/>
+              </a:spcBef>
+              <a:spcAft>
+                <a:spcPts val="0"/>
+              </a:spcAft>
+              <a:buNone/>
+            </a:pPr>
+            <a:r>
+              <a:rPr lang="en-US" sz="1150" b="0" i="0" u="none" strike="noStrike" cap="none">
+                <a:solidFill>
+                  <a:srgbClr val="33322F"/>
+                </a:solidFill>
+                <a:latin typeface="Instrument Sans"/>
+                <a:ea typeface="Instrument Sans"/>
+                <a:cs typeface="Instrument Sans"/>
+                <a:sym typeface="Instrument Sans"/>
+              </a:rPr>
+              <a:t>Meta, launched Sep 8</a:t>
+            </a:r>
+          </a:p>
+        </p:txBody>
+      </p:sp>
+      <p:sp>
+        <p:nvSpPr>
+          <p:cNvPr id="5009" name="SimReal 5009"/>
+          <p:cNvSpPr/>
+          <p:nvPr/>
+        </p:nvSpPr>
+        <p:spPr>
+          <a:xfrm>
+            <a:off x="3390138" y="1755648"/>
+            <a:ext cx="2567178" cy="18288"/>
+          </a:xfrm>
+          <a:prstGeom prst="rect">
+            <a:avLst/>
+          </a:prstGeom>
+          <a:solidFill>
+            <a:srgbClr val="111110"/>
+          </a:solidFill>
+          <a:ln>
+            <a:noFill/>
+          </a:ln>
+        </p:spPr>
+        <p:txBody>
+          <a:bodyPr/>
+          <a:lstStyle/>
+          <a:p>
+            <a:endParaRPr/>
+          </a:p>
+        </p:txBody>
+      </p:sp>
+      <p:sp>
+        <p:nvSpPr>
+          <p:cNvPr id="5010" name="SimReal 5010"/>
+          <p:cNvSpPr txBox="1"/>
+          <p:nvPr/>
+        </p:nvSpPr>
+        <p:spPr>
+          <a:xfrm>
+            <a:off x="3390138" y="1883664"/>
+            <a:ext cx="2567178" cy="658368"/>
+          </a:xfrm>
+          <a:prstGeom prst="rect">
+            <a:avLst/>
+          </a:prstGeom>
+          <a:noFill/>
+          <a:ln>
+            <a:noFill/>
+          </a:ln>
+        </p:spPr>
+        <p:txBody>
+          <a:bodyPr spcFirstLastPara="1" wrap="square" lIns="0" tIns="0" rIns="0" bIns="0" anchor="t" anchorCtr="0">
+            <a:noAutofit/>
+          </a:bodyPr>
+          <a:lstStyle/>
+          <a:p>
+            <a:pPr marL="0" marR="0" lvl="0" indent="0" algn="l" rtl="0">
+              <a:spcBef>
+                <a:spcPts val="0"/>
+              </a:spcBef>
+              <a:spcAft>
+                <a:spcPts val="0"/>
+              </a:spcAft>
+              <a:buNone/>
+            </a:pPr>
+            <a:r>
+              <a:rPr lang="en-US" sz="4000" b="0" i="0" u="none" strike="noStrike" cap="none">
+                <a:solidFill>
+                  <a:srgbClr val="111110"/>
+                </a:solidFill>
+                <a:latin typeface="Newsreader"/>
+                <a:ea typeface="Newsreader"/>
+                <a:cs typeface="Newsreader"/>
+                <a:sym typeface="Newsreader"/>
+              </a:rPr>
+              <a:t>Dots</a:t>
+            </a:r>
+          </a:p>
+        </p:txBody>
+      </p:sp>
+      <p:sp>
+        <p:nvSpPr>
+          <p:cNvPr id="5011" name="SimReal 5011"/>
+          <p:cNvSpPr txBox="1"/>
+          <p:nvPr/>
+        </p:nvSpPr>
+        <p:spPr>
+          <a:xfrm>
+            <a:off x="3390138" y="2596896"/>
+            <a:ext cx="2567178" cy="457200"/>
+          </a:xfrm>
+          <a:prstGeom prst="rect">
+            <a:avLst/>
+          </a:prstGeom>
+          <a:noFill/>
+          <a:ln>
+            <a:noFill/>
+          </a:ln>
+        </p:spPr>
+        <p:txBody>
+          <a:bodyPr spcFirstLastPara="1" wrap="square" lIns="0" tIns="0" rIns="0" bIns="0" anchor="t" anchorCtr="0">
+            <a:noAutofit/>
+          </a:bodyPr>
+          <a:lstStyle/>
+          <a:p>
+            <a:pPr marL="0" marR="0" lvl="0" indent="0" algn="l" rtl="0">
+              <a:lnSpc>
+                <a:spcPct val="110000"/>
+              </a:lnSpc>
+              <a:spcBef>
+                <a:spcPts val="0"/>
+              </a:spcBef>
+              <a:spcAft>
+                <a:spcPts val="0"/>
+              </a:spcAft>
+              <a:buNone/>
+            </a:pPr>
+            <a:r>
+              <a:rPr lang="en-US" sz="1150" b="0" i="0" u="none" strike="noStrike" cap="none">
+                <a:solidFill>
+                  <a:srgbClr val="33322F"/>
+                </a:solidFill>
+                <a:latin typeface="Instrument Sans"/>
+                <a:ea typeface="Instrument Sans"/>
+                <a:cs typeface="Instrument Sans"/>
+                <a:sym typeface="Instrument Sans"/>
+              </a:rPr>
+              <a:t>OpenAI, unveiled Sep 29</a:t>
+            </a:r>
+          </a:p>
+        </p:txBody>
+      </p:sp>
+      <p:sp>
+        <p:nvSpPr>
+          <p:cNvPr id="5012" name="SimReal 5012"/>
+          <p:cNvSpPr/>
+          <p:nvPr/>
+        </p:nvSpPr>
+        <p:spPr>
+          <a:xfrm>
+            <a:off x="6231636" y="1755648"/>
+            <a:ext cx="2567178" cy="18288"/>
+          </a:xfrm>
+          <a:prstGeom prst="rect">
+            <a:avLst/>
+          </a:prstGeom>
+          <a:solidFill>
+            <a:srgbClr val="111110"/>
+          </a:solidFill>
+          <a:ln>
+            <a:noFill/>
+          </a:ln>
+        </p:spPr>
+        <p:txBody>
+          <a:bodyPr/>
+          <a:lstStyle/>
+          <a:p>
+            <a:endParaRPr/>
+          </a:p>
+        </p:txBody>
+      </p:sp>
+      <p:sp>
+        <p:nvSpPr>
+          <p:cNvPr id="5013" name="SimReal 5013"/>
+          <p:cNvSpPr txBox="1"/>
+          <p:nvPr/>
+        </p:nvSpPr>
+        <p:spPr>
+          <a:xfrm>
+            <a:off x="6231636" y="1883664"/>
+            <a:ext cx="2567178" cy="658368"/>
+          </a:xfrm>
+          <a:prstGeom prst="rect">
+            <a:avLst/>
+          </a:prstGeom>
+          <a:noFill/>
+          <a:ln>
+            <a:noFill/>
+          </a:ln>
+        </p:spPr>
+        <p:txBody>
+          <a:bodyPr spcFirstLastPara="1" wrap="square" lIns="0" tIns="0" rIns="0" bIns="0" anchor="t" anchorCtr="0">
+            <a:noAutofit/>
+          </a:bodyPr>
+          <a:lstStyle/>
+          <a:p>
+            <a:pPr marL="0" marR="0" lvl="0" indent="0" algn="l" rtl="0">
+              <a:spcBef>
+                <a:spcPts val="0"/>
+              </a:spcBef>
+              <a:spcAft>
+                <a:spcPts val="0"/>
+              </a:spcAft>
+              <a:buNone/>
+            </a:pPr>
+            <a:r>
+              <a:rPr lang="en-US" sz="4000" b="0" i="0" u="none" strike="noStrike" cap="none">
+                <a:solidFill>
+                  <a:srgbClr val="111110"/>
+                </a:solidFill>
+                <a:latin typeface="Newsreader"/>
+                <a:ea typeface="Newsreader"/>
+                <a:cs typeface="Newsreader"/>
+                <a:sym typeface="Newsreader"/>
+              </a:rPr>
+              <a:t>$10B</a:t>
+            </a:r>
+          </a:p>
+        </p:txBody>
+      </p:sp>
+      <p:sp>
+        <p:nvSpPr>
+          <p:cNvPr id="5014" name="SimReal 5014"/>
+          <p:cNvSpPr txBox="1"/>
+          <p:nvPr/>
+        </p:nvSpPr>
+        <p:spPr>
+          <a:xfrm>
+            <a:off x="6231636" y="2596896"/>
+            <a:ext cx="2567178" cy="457200"/>
+          </a:xfrm>
+          <a:prstGeom prst="rect">
+            <a:avLst/>
+          </a:prstGeom>
+          <a:noFill/>
+          <a:ln>
+            <a:noFill/>
+          </a:ln>
+        </p:spPr>
+        <p:txBody>
+          <a:bodyPr spcFirstLastPara="1" wrap="square" lIns="0" tIns="0" rIns="0" bIns="0" anchor="t" anchorCtr="0">
+            <a:noAutofit/>
+          </a:bodyPr>
+          <a:lstStyle/>
+          <a:p>
+            <a:pPr marL="0" marR="0" lvl="0" indent="0" algn="l" rtl="0">
+              <a:lnSpc>
+                <a:spcPct val="110000"/>
+              </a:lnSpc>
+              <a:spcBef>
+                <a:spcPts val="0"/>
+              </a:spcBef>
+              <a:spcAft>
+                <a:spcPts val="0"/>
+              </a:spcAft>
+              <a:buNone/>
+            </a:pPr>
+            <a:r>
+              <a:rPr lang="en-US" sz="1150" b="0" i="0" u="none" strike="noStrike" cap="none">
+                <a:solidFill>
+                  <a:srgbClr val="33322F"/>
+                </a:solidFill>
+                <a:latin typeface="Instrument Sans"/>
+                <a:ea typeface="Instrument Sans"/>
+                <a:cs typeface="Instrument Sans"/>
+                <a:sym typeface="Instrument Sans"/>
+              </a:rPr>
+              <a:t>Instinct, up 4x in 33 days</a:t>
+            </a:r>
+          </a:p>
+        </p:txBody>
+      </p:sp>
+      <p:sp>
+        <p:nvSpPr>
+          <p:cNvPr id="5015" name="SimReal 5015"/>
+          <p:cNvSpPr/>
+          <p:nvPr/>
+        </p:nvSpPr>
+        <p:spPr>
+          <a:xfrm>
+            <a:off x="9073134" y="1755648"/>
+            <a:ext cx="2567178" cy="18288"/>
+          </a:xfrm>
+          <a:prstGeom prst="rect">
+            <a:avLst/>
+          </a:prstGeom>
+          <a:solidFill>
+            <a:srgbClr val="C2410C"/>
+          </a:solidFill>
+          <a:ln>
+            <a:noFill/>
+          </a:ln>
+        </p:spPr>
+        <p:txBody>
+          <a:bodyPr/>
+          <a:lstStyle/>
+          <a:p>
+            <a:endParaRPr/>
+          </a:p>
+        </p:txBody>
+      </p:sp>
+      <p:sp>
+        <p:nvSpPr>
+          <p:cNvPr id="5016" name="SimReal 5016"/>
+          <p:cNvSpPr txBox="1"/>
+          <p:nvPr/>
+        </p:nvSpPr>
+        <p:spPr>
+          <a:xfrm>
+            <a:off x="9073134" y="1883664"/>
+            <a:ext cx="2567178" cy="658368"/>
+          </a:xfrm>
+          <a:prstGeom prst="rect">
+            <a:avLst/>
+          </a:prstGeom>
+          <a:noFill/>
+          <a:ln>
+            <a:noFill/>
+          </a:ln>
+        </p:spPr>
+        <p:txBody>
+          <a:bodyPr spcFirstLastPara="1" wrap="square" lIns="0" tIns="0" rIns="0" bIns="0" anchor="t" anchorCtr="0">
+            <a:noAutofit/>
+          </a:bodyPr>
+          <a:lstStyle/>
+          <a:p>
+            <a:pPr marL="0" marR="0" lvl="0" indent="0" algn="l" rtl="0">
+              <a:spcBef>
+                <a:spcPts val="0"/>
+              </a:spcBef>
+              <a:spcAft>
+                <a:spcPts val="0"/>
+              </a:spcAft>
+              <a:buNone/>
+            </a:pPr>
+            <a:r>
+              <a:rPr lang="en-US" sz="4000" b="0" i="0" u="none" strike="noStrike" cap="none">
+                <a:solidFill>
+                  <a:srgbClr val="C2410C"/>
+                </a:solidFill>
+                <a:latin typeface="Newsreader"/>
+                <a:ea typeface="Newsreader"/>
+                <a:cs typeface="Newsreader"/>
+                <a:sym typeface="Newsreader"/>
+              </a:rPr>
+              <a:t>16.1%</a:t>
+            </a:r>
+          </a:p>
+        </p:txBody>
+      </p:sp>
+      <p:sp>
+        <p:nvSpPr>
+          <p:cNvPr id="5017" name="SimReal 5017"/>
+          <p:cNvSpPr txBox="1"/>
+          <p:nvPr/>
+        </p:nvSpPr>
+        <p:spPr>
+          <a:xfrm>
+            <a:off x="9073134" y="2596896"/>
+            <a:ext cx="2567178" cy="457200"/>
+          </a:xfrm>
+          <a:prstGeom prst="rect">
+            <a:avLst/>
+          </a:prstGeom>
+          <a:noFill/>
+          <a:ln>
+            <a:noFill/>
+          </a:ln>
+        </p:spPr>
+        <p:txBody>
+          <a:bodyPr spcFirstLastPara="1" wrap="square" lIns="0" tIns="0" rIns="0" bIns="0" anchor="t" anchorCtr="0">
+            <a:noAutofit/>
+          </a:bodyPr>
+          <a:lstStyle/>
+          <a:p>
+            <a:pPr marL="0" marR="0" lvl="0" indent="0" algn="l" rtl="0">
+              <a:lnSpc>
+                <a:spcPct val="110000"/>
+              </a:lnSpc>
+              <a:spcBef>
+                <a:spcPts val="0"/>
+              </a:spcBef>
+              <a:spcAft>
+                <a:spcPts val="0"/>
+              </a:spcAft>
+              <a:buNone/>
+            </a:pPr>
+            <a:r>
+              <a:rPr lang="en-US" sz="1150" b="0" i="0" u="none" strike="noStrike" cap="none">
+                <a:solidFill>
+                  <a:srgbClr val="33322F"/>
+                </a:solidFill>
+                <a:latin typeface="Instrument Sans"/>
+                <a:ea typeface="Instrument Sans"/>
+                <a:cs typeface="Instrument Sans"/>
+                <a:sym typeface="Instrument Sans"/>
+              </a:rPr>
+              <a:t>Yet the best model completes 16.1%</a:t>
+            </a:r>
+          </a:p>
+          <a:p>
+            <a:pPr marL="0" marR="0" lvl="0" indent="0" algn="l" rtl="0">
+              <a:lnSpc>
+                <a:spcPct val="110000"/>
+              </a:lnSpc>
+              <a:spcBef>
+                <a:spcPts val="0"/>
+              </a:spcBef>
+              <a:spcAft>
+                <a:spcPts val="0"/>
+              </a:spcAft>
+              <a:buNone/>
+            </a:pPr>
+            <a:r>
+              <a:rPr lang="en-US" sz="1150" b="0" i="0" u="none" strike="noStrike" cap="none">
+                <a:solidFill>
+                  <a:srgbClr val="33322F"/>
+                </a:solidFill>
+                <a:latin typeface="Instrument Sans"/>
+                <a:ea typeface="Instrument Sans"/>
+                <a:cs typeface="Instrument Sans"/>
+                <a:sym typeface="Instrument Sans"/>
+              </a:rPr>
+              <a:t>of real freelance projects</a:t>
+            </a:r>
+          </a:p>
+        </p:txBody>
+      </p:sp>
+      <p:sp>
+        <p:nvSpPr>
+          <p:cNvPr id="5018" name="SimReal 5018"/>
+          <p:cNvSpPr txBox="1"/>
+          <p:nvPr/>
+        </p:nvSpPr>
+        <p:spPr>
+          <a:xfrm>
+            <a:off x="548640" y="3529584"/>
+            <a:ext cx="7315200" cy="201168"/>
+          </a:xfrm>
+          <a:prstGeom prst="rect">
+            <a:avLst/>
+          </a:prstGeom>
+          <a:noFill/>
+          <a:ln>
+            <a:noFill/>
+          </a:ln>
+        </p:spPr>
+        <p:txBody>
+          <a:bodyPr spcFirstLastPara="1" wrap="square" lIns="0" tIns="0" rIns="0" bIns="0" anchor="t" anchorCtr="0">
+            <a:noAutofit/>
+          </a:bodyPr>
+          <a:lstStyle/>
+          <a:p>
+            <a:pPr marL="0" marR="0" lvl="0" indent="0" algn="l" rtl="0">
+              <a:spcBef>
+                <a:spcPts val="0"/>
+              </a:spcBef>
+              <a:spcAft>
+                <a:spcPts val="0"/>
+              </a:spcAft>
+              <a:buNone/>
+            </a:pPr>
+            <a:r>
+              <a:rPr lang="en-US" sz="1000" b="0" i="0" u="none" strike="noStrike" cap="none">
                 <a:solidFill>
                   <a:srgbClr val="6E6C66"/>
                 </a:solidFill>
@@ -30554,662 +31094,119 @@
                 <a:cs typeface="IBM Plex Mono"/>
                 <a:sym typeface="IBM Plex Mono"/>
               </a:rPr>
-              <a:t>Meta · Sep 8</a:t>
-            </a:r>
-          </a:p>
-        </p:txBody>
-      </p:sp>
-      <p:sp>
-        <p:nvSpPr>
-          <p:cNvPr id="5008" name="SimReal 5008"/>
-          <p:cNvSpPr txBox="1"/>
-          <p:nvPr/>
-        </p:nvSpPr>
-        <p:spPr>
-          <a:xfrm>
-            <a:off x="548640" y="2084832"/>
-            <a:ext cx="2567178" cy="566928"/>
-          </a:xfrm>
-          <a:prstGeom prst="rect">
-            <a:avLst/>
-          </a:prstGeom>
-          <a:noFill/>
-          <a:ln>
-            <a:noFill/>
-          </a:ln>
-        </p:spPr>
-        <p:txBody>
-          <a:bodyPr spcFirstLastPara="1" wrap="square" lIns="0" tIns="0" rIns="0" bIns="0" anchor="t" anchorCtr="0">
-            <a:noAutofit/>
-          </a:bodyPr>
-          <a:lstStyle/>
-          <a:p>
-            <a:pPr marL="0" marR="0" lvl="0" indent="0" algn="l" rtl="0">
-              <a:spcBef>
-                <a:spcPts val="0"/>
-              </a:spcBef>
-              <a:spcAft>
-                <a:spcPts val="0"/>
-              </a:spcAft>
-              <a:buNone/>
-            </a:pPr>
-            <a:r>
-              <a:rPr lang="en-US" sz="3200" b="0" i="0" u="none" strike="noStrike" cap="none">
-                <a:solidFill>
-                  <a:srgbClr val="C2410C"/>
+              <a:t>So they practice in our worlds first</a:t>
+            </a:r>
+          </a:p>
+        </p:txBody>
+      </p:sp>
+      <p:sp>
+        <p:nvSpPr>
+          <p:cNvPr id="5019" name="SimReal 5019"/>
+          <p:cNvSpPr txBox="1"/>
+          <p:nvPr/>
+        </p:nvSpPr>
+        <p:spPr>
+          <a:xfrm>
+            <a:off x="548640" y="3767328"/>
+            <a:ext cx="11091672" cy="457200"/>
+          </a:xfrm>
+          <a:prstGeom prst="rect">
+            <a:avLst/>
+          </a:prstGeom>
+          <a:noFill/>
+          <a:ln>
+            <a:noFill/>
+          </a:ln>
+        </p:spPr>
+        <p:txBody>
+          <a:bodyPr spcFirstLastPara="1" wrap="square" lIns="0" tIns="0" rIns="0" bIns="0" anchor="ctr" anchorCtr="0">
+            <a:noAutofit/>
+          </a:bodyPr>
+          <a:lstStyle/>
+          <a:p>
+            <a:pPr marL="0" marR="0" lvl="0" indent="0" algn="l" rtl="0">
+              <a:spcBef>
+                <a:spcPts val="0"/>
+              </a:spcBef>
+              <a:spcAft>
+                <a:spcPts val="0"/>
+              </a:spcAft>
+              <a:buNone/>
+            </a:pPr>
+            <a:r>
+              <a:rPr lang="en-US" sz="2200" b="0" i="0" u="none" strike="noStrike" cap="none">
+                <a:solidFill>
+                  <a:srgbClr val="111110"/>
                 </a:solidFill>
                 <a:latin typeface="Newsreader"/>
                 <a:ea typeface="Newsreader"/>
                 <a:cs typeface="Newsreader"/>
                 <a:sym typeface="Newsreader"/>
               </a:rPr>
-              <a:t>Muse</a:t>
-            </a:r>
-          </a:p>
-        </p:txBody>
-      </p:sp>
-      <p:sp>
-        <p:nvSpPr>
-          <p:cNvPr id="5009" name="SimReal 5009"/>
-          <p:cNvSpPr txBox="1"/>
-          <p:nvPr/>
-        </p:nvSpPr>
-        <p:spPr>
-          <a:xfrm>
-            <a:off x="548640" y="2706624"/>
-            <a:ext cx="2567178" cy="457200"/>
-          </a:xfrm>
-          <a:prstGeom prst="rect">
-            <a:avLst/>
-          </a:prstGeom>
-          <a:noFill/>
-          <a:ln>
-            <a:noFill/>
-          </a:ln>
-        </p:spPr>
-        <p:txBody>
-          <a:bodyPr spcFirstLastPara="1" wrap="square" lIns="0" tIns="0" rIns="0" bIns="0" anchor="t" anchorCtr="0">
-            <a:noAutofit/>
-          </a:bodyPr>
-          <a:lstStyle/>
-          <a:p>
-            <a:pPr marL="0" marR="0" lvl="0" indent="0" algn="l" rtl="0">
-              <a:lnSpc>
-                <a:spcPct val="110000"/>
-              </a:lnSpc>
-              <a:spcBef>
-                <a:spcPts val="0"/>
-              </a:spcBef>
-              <a:spcAft>
-                <a:spcPts val="0"/>
-              </a:spcAft>
-              <a:buNone/>
-            </a:pPr>
-            <a:r>
-              <a:rPr lang="en-US" sz="1000" b="0" i="0" u="none" strike="noStrike" cap="none">
-                <a:solidFill>
-                  <a:srgbClr val="33322F"/>
-                </a:solidFill>
-                <a:latin typeface="Instrument Sans"/>
-                <a:ea typeface="Instrument Sans"/>
-                <a:cs typeface="Instrument Sans"/>
-                <a:sym typeface="Instrument Sans"/>
-              </a:rPr>
-              <a:t>Books, shops and schedules for you;</a:t>
-            </a:r>
-          </a:p>
-          <a:p>
-            <a:pPr marL="0" marR="0" lvl="0" indent="0" algn="l" rtl="0">
-              <a:lnSpc>
-                <a:spcPct val="110000"/>
-              </a:lnSpc>
-              <a:spcBef>
-                <a:spcPts val="0"/>
-              </a:spcBef>
-              <a:spcAft>
-                <a:spcPts val="0"/>
-              </a:spcAft>
-              <a:buNone/>
-            </a:pPr>
-            <a:r>
-              <a:rPr lang="en-US" sz="1000" b="0" i="0" u="none" strike="noStrike" cap="none">
-                <a:solidFill>
-                  <a:srgbClr val="33322F"/>
-                </a:solidFill>
-                <a:latin typeface="Instrument Sans"/>
-                <a:ea typeface="Instrument Sans"/>
-                <a:cs typeface="Instrument Sans"/>
-                <a:sym typeface="Instrument Sans"/>
-              </a:rPr>
-              <a:t>blocked by Amazon two weeks later</a:t>
-            </a:r>
-          </a:p>
-        </p:txBody>
-      </p:sp>
-      <p:sp>
-        <p:nvSpPr>
-          <p:cNvPr id="5010" name="SimReal 5010"/>
-          <p:cNvSpPr/>
-          <p:nvPr/>
-        </p:nvSpPr>
-        <p:spPr>
-          <a:xfrm>
-            <a:off x="3390138" y="1755648"/>
-            <a:ext cx="2567178" cy="18288"/>
-          </a:xfrm>
-          <a:prstGeom prst="rect">
-            <a:avLst/>
-          </a:prstGeom>
-          <a:solidFill>
-            <a:srgbClr val="111110"/>
-          </a:solidFill>
-          <a:ln>
-            <a:noFill/>
-          </a:ln>
-        </p:spPr>
-        <p:txBody>
-          <a:bodyPr/>
-          <a:lstStyle/>
-          <a:p>
-            <a:endParaRPr/>
-          </a:p>
-        </p:txBody>
-      </p:sp>
-      <p:sp>
-        <p:nvSpPr>
-          <p:cNvPr id="5011" name="SimReal 5011"/>
-          <p:cNvSpPr txBox="1"/>
-          <p:nvPr/>
-        </p:nvSpPr>
-        <p:spPr>
-          <a:xfrm>
-            <a:off x="3390138" y="1865376"/>
-            <a:ext cx="2567178" cy="201168"/>
-          </a:xfrm>
-          <a:prstGeom prst="rect">
-            <a:avLst/>
-          </a:prstGeom>
-          <a:noFill/>
-          <a:ln>
-            <a:noFill/>
-          </a:ln>
-        </p:spPr>
-        <p:txBody>
-          <a:bodyPr spcFirstLastPara="1" wrap="square" lIns="0" tIns="0" rIns="0" bIns="0" anchor="t" anchorCtr="0">
-            <a:noAutofit/>
-          </a:bodyPr>
-          <a:lstStyle/>
-          <a:p>
-            <a:pPr marL="0" marR="0" lvl="0" indent="0" algn="l" rtl="0">
-              <a:spcBef>
-                <a:spcPts val="0"/>
-              </a:spcBef>
-              <a:spcAft>
-                <a:spcPts val="0"/>
-              </a:spcAft>
-              <a:buNone/>
-            </a:pPr>
-            <a:r>
-              <a:rPr lang="en-US" sz="950" b="0" i="0" u="none" strike="noStrike" cap="none">
+              <a:t>Practice</a:t>
+            </a:r>
+            <a:r>
+              <a:rPr lang="en-US" sz="1600" b="0" i="0" u="none" strike="noStrike" cap="none">
                 <a:solidFill>
                   <a:srgbClr val="6E6C66"/>
                 </a:solidFill>
-                <a:latin typeface="IBM Plex Mono"/>
-                <a:ea typeface="IBM Plex Mono"/>
-                <a:cs typeface="IBM Plex Mono"/>
-                <a:sym typeface="IBM Plex Mono"/>
-              </a:rPr>
-              <a:t>OpenAI · Sep 29</a:t>
-            </a:r>
-          </a:p>
-        </p:txBody>
-      </p:sp>
-      <p:sp>
-        <p:nvSpPr>
-          <p:cNvPr id="5012" name="SimReal 5012"/>
-          <p:cNvSpPr txBox="1"/>
-          <p:nvPr/>
-        </p:nvSpPr>
-        <p:spPr>
-          <a:xfrm>
-            <a:off x="3390138" y="2084832"/>
-            <a:ext cx="2567178" cy="566928"/>
-          </a:xfrm>
-          <a:prstGeom prst="rect">
-            <a:avLst/>
-          </a:prstGeom>
-          <a:noFill/>
-          <a:ln>
-            <a:noFill/>
-          </a:ln>
-        </p:spPr>
-        <p:txBody>
-          <a:bodyPr spcFirstLastPara="1" wrap="square" lIns="0" tIns="0" rIns="0" bIns="0" anchor="t" anchorCtr="0">
-            <a:noAutofit/>
-          </a:bodyPr>
-          <a:lstStyle/>
-          <a:p>
-            <a:pPr marL="0" marR="0" lvl="0" indent="0" algn="l" rtl="0">
-              <a:spcBef>
-                <a:spcPts val="0"/>
-              </a:spcBef>
-              <a:spcAft>
-                <a:spcPts val="0"/>
-              </a:spcAft>
-              <a:buNone/>
-            </a:pPr>
-            <a:r>
-              <a:rPr lang="en-US" sz="3200" b="0" i="0" u="none" strike="noStrike" cap="none">
-                <a:solidFill>
-                  <a:srgbClr val="C2410C"/>
+                <a:latin typeface="Instrument Sans"/>
+                <a:ea typeface="Instrument Sans"/>
+                <a:cs typeface="Instrument Sans"/>
+                <a:sym typeface="Instrument Sans"/>
+              </a:rPr>
+              <a:t>   →   </a:t>
+            </a:r>
+            <a:r>
+              <a:rPr lang="en-US" sz="2200" b="0" i="0" u="none" strike="noStrike" cap="none">
+                <a:solidFill>
+                  <a:srgbClr val="111110"/>
                 </a:solidFill>
                 <a:latin typeface="Newsreader"/>
                 <a:ea typeface="Newsreader"/>
                 <a:cs typeface="Newsreader"/>
                 <a:sym typeface="Newsreader"/>
               </a:rPr>
-              <a:t>Dots</a:t>
-            </a:r>
-          </a:p>
-        </p:txBody>
-      </p:sp>
-      <p:sp>
-        <p:nvSpPr>
-          <p:cNvPr id="5013" name="SimReal 5013"/>
-          <p:cNvSpPr txBox="1"/>
-          <p:nvPr/>
-        </p:nvSpPr>
-        <p:spPr>
-          <a:xfrm>
-            <a:off x="3390138" y="2706624"/>
-            <a:ext cx="2567178" cy="457200"/>
-          </a:xfrm>
-          <a:prstGeom prst="rect">
-            <a:avLst/>
-          </a:prstGeom>
-          <a:noFill/>
-          <a:ln>
-            <a:noFill/>
-          </a:ln>
-        </p:spPr>
-        <p:txBody>
-          <a:bodyPr spcFirstLastPara="1" wrap="square" lIns="0" tIns="0" rIns="0" bIns="0" anchor="t" anchorCtr="0">
-            <a:noAutofit/>
-          </a:bodyPr>
-          <a:lstStyle/>
-          <a:p>
-            <a:pPr marL="0" marR="0" lvl="0" indent="0" algn="l" rtl="0">
-              <a:lnSpc>
-                <a:spcPct val="110000"/>
-              </a:lnSpc>
-              <a:spcBef>
-                <a:spcPts val="0"/>
-              </a:spcBef>
-              <a:spcAft>
-                <a:spcPts val="0"/>
-              </a:spcAft>
-              <a:buNone/>
-            </a:pPr>
-            <a:r>
-              <a:rPr lang="en-US" sz="1000" b="0" i="0" u="none" strike="noStrike" cap="none">
-                <a:solidFill>
-                  <a:srgbClr val="33322F"/>
-                </a:solidFill>
-                <a:latin typeface="Instrument Sans"/>
-                <a:ea typeface="Instrument Sans"/>
-                <a:cs typeface="Instrument Sans"/>
-                <a:sym typeface="Instrument Sans"/>
-              </a:rPr>
-              <a:t>Always-on personal agents that</a:t>
-            </a:r>
-          </a:p>
-          <a:p>
-            <a:pPr marL="0" marR="0" lvl="0" indent="0" algn="l" rtl="0">
-              <a:lnSpc>
-                <a:spcPct val="110000"/>
-              </a:lnSpc>
-              <a:spcBef>
-                <a:spcPts val="0"/>
-              </a:spcBef>
-              <a:spcAft>
-                <a:spcPts val="0"/>
-              </a:spcAft>
-              <a:buNone/>
-            </a:pPr>
-            <a:r>
-              <a:rPr lang="en-US" sz="1000" b="0" i="0" u="none" strike="noStrike" cap="none">
-                <a:solidFill>
-                  <a:srgbClr val="33322F"/>
-                </a:solidFill>
-                <a:latin typeface="Instrument Sans"/>
-                <a:ea typeface="Instrument Sans"/>
-                <a:cs typeface="Instrument Sans"/>
-                <a:sym typeface="Instrument Sans"/>
-              </a:rPr>
-              <a:t>keep working in the background</a:t>
-            </a:r>
-          </a:p>
-        </p:txBody>
-      </p:sp>
-      <p:sp>
-        <p:nvSpPr>
-          <p:cNvPr id="5014" name="SimReal 5014"/>
-          <p:cNvSpPr/>
-          <p:nvPr/>
-        </p:nvSpPr>
-        <p:spPr>
-          <a:xfrm>
-            <a:off x="6231636" y="1755648"/>
-            <a:ext cx="2567178" cy="18288"/>
-          </a:xfrm>
-          <a:prstGeom prst="rect">
-            <a:avLst/>
-          </a:prstGeom>
-          <a:solidFill>
-            <a:srgbClr val="111110"/>
-          </a:solidFill>
-          <a:ln>
-            <a:noFill/>
-          </a:ln>
-        </p:spPr>
-        <p:txBody>
-          <a:bodyPr/>
-          <a:lstStyle/>
-          <a:p>
-            <a:endParaRPr/>
-          </a:p>
-        </p:txBody>
-      </p:sp>
-      <p:sp>
-        <p:nvSpPr>
-          <p:cNvPr id="5015" name="SimReal 5015"/>
-          <p:cNvSpPr txBox="1"/>
-          <p:nvPr/>
-        </p:nvSpPr>
-        <p:spPr>
-          <a:xfrm>
-            <a:off x="6231636" y="1865376"/>
-            <a:ext cx="2567178" cy="201168"/>
-          </a:xfrm>
-          <a:prstGeom prst="rect">
-            <a:avLst/>
-          </a:prstGeom>
-          <a:noFill/>
-          <a:ln>
-            <a:noFill/>
-          </a:ln>
-        </p:spPr>
-        <p:txBody>
-          <a:bodyPr spcFirstLastPara="1" wrap="square" lIns="0" tIns="0" rIns="0" bIns="0" anchor="t" anchorCtr="0">
-            <a:noAutofit/>
-          </a:bodyPr>
-          <a:lstStyle/>
-          <a:p>
-            <a:pPr marL="0" marR="0" lvl="0" indent="0" algn="l" rtl="0">
-              <a:spcBef>
-                <a:spcPts val="0"/>
-              </a:spcBef>
-              <a:spcAft>
-                <a:spcPts val="0"/>
-              </a:spcAft>
-              <a:buNone/>
-            </a:pPr>
-            <a:r>
-              <a:rPr lang="en-US" sz="950" b="0" i="0" u="none" strike="noStrike" cap="none">
+              <a:t>Real outcomes settle</a:t>
+            </a:r>
+            <a:r>
+              <a:rPr lang="en-US" sz="1600" b="0" i="0" u="none" strike="noStrike" cap="none">
                 <a:solidFill>
                   <a:srgbClr val="6E6C66"/>
                 </a:solidFill>
-                <a:latin typeface="IBM Plex Mono"/>
-                <a:ea typeface="IBM Plex Mono"/>
-                <a:cs typeface="IBM Plex Mono"/>
-                <a:sym typeface="IBM Plex Mono"/>
-              </a:rPr>
-              <a:t>Instinct · Sep 28</a:t>
-            </a:r>
-          </a:p>
-        </p:txBody>
-      </p:sp>
-      <p:sp>
-        <p:nvSpPr>
-          <p:cNvPr id="5016" name="SimReal 5016"/>
-          <p:cNvSpPr txBox="1"/>
-          <p:nvPr/>
-        </p:nvSpPr>
-        <p:spPr>
-          <a:xfrm>
-            <a:off x="6231636" y="2084832"/>
-            <a:ext cx="2567178" cy="566928"/>
-          </a:xfrm>
-          <a:prstGeom prst="rect">
-            <a:avLst/>
-          </a:prstGeom>
-          <a:noFill/>
-          <a:ln>
-            <a:noFill/>
-          </a:ln>
-        </p:spPr>
-        <p:txBody>
-          <a:bodyPr spcFirstLastPara="1" wrap="square" lIns="0" tIns="0" rIns="0" bIns="0" anchor="t" anchorCtr="0">
-            <a:noAutofit/>
-          </a:bodyPr>
-          <a:lstStyle/>
-          <a:p>
-            <a:pPr marL="0" marR="0" lvl="0" indent="0" algn="l" rtl="0">
-              <a:spcBef>
-                <a:spcPts val="0"/>
-              </a:spcBef>
-              <a:spcAft>
-                <a:spcPts val="0"/>
-              </a:spcAft>
-              <a:buNone/>
-            </a:pPr>
-            <a:r>
-              <a:rPr lang="en-US" sz="3200" b="0" i="0" u="none" strike="noStrike" cap="none">
-                <a:solidFill>
-                  <a:srgbClr val="C2410C"/>
+                <a:latin typeface="Instrument Sans"/>
+                <a:ea typeface="Instrument Sans"/>
+                <a:cs typeface="Instrument Sans"/>
+                <a:sym typeface="Instrument Sans"/>
+              </a:rPr>
+              <a:t>   →   </a:t>
+            </a:r>
+            <a:r>
+              <a:rPr lang="en-US" sz="2200" b="0" i="0" u="none" strike="noStrike" cap="none">
+                <a:solidFill>
+                  <a:srgbClr val="111110"/>
                 </a:solidFill>
                 <a:latin typeface="Newsreader"/>
                 <a:ea typeface="Newsreader"/>
                 <a:cs typeface="Newsreader"/>
                 <a:sym typeface="Newsreader"/>
               </a:rPr>
-              <a:t>$10B</a:t>
-            </a:r>
-          </a:p>
-        </p:txBody>
-      </p:sp>
-      <p:sp>
-        <p:nvSpPr>
-          <p:cNvPr id="5017" name="SimReal 5017"/>
-          <p:cNvSpPr txBox="1"/>
-          <p:nvPr/>
-        </p:nvSpPr>
-        <p:spPr>
-          <a:xfrm>
-            <a:off x="6231636" y="2706624"/>
-            <a:ext cx="2567178" cy="457200"/>
-          </a:xfrm>
-          <a:prstGeom prst="rect">
-            <a:avLst/>
-          </a:prstGeom>
-          <a:noFill/>
-          <a:ln>
-            <a:noFill/>
-          </a:ln>
-        </p:spPr>
-        <p:txBody>
-          <a:bodyPr spcFirstLastPara="1" wrap="square" lIns="0" tIns="0" rIns="0" bIns="0" anchor="t" anchorCtr="0">
-            <a:noAutofit/>
-          </a:bodyPr>
-          <a:lstStyle/>
-          <a:p>
-            <a:pPr marL="0" marR="0" lvl="0" indent="0" algn="l" rtl="0">
-              <a:lnSpc>
-                <a:spcPct val="110000"/>
-              </a:lnSpc>
-              <a:spcBef>
-                <a:spcPts val="0"/>
-              </a:spcBef>
-              <a:spcAft>
-                <a:spcPts val="0"/>
-              </a:spcAft>
-              <a:buNone/>
-            </a:pPr>
-            <a:r>
-              <a:rPr lang="en-US" sz="1000" b="0" i="0" u="none" strike="noStrike" cap="none">
-                <a:solidFill>
-                  <a:srgbClr val="33322F"/>
-                </a:solidFill>
-                <a:latin typeface="Instrument Sans"/>
-                <a:ea typeface="Instrument Sans"/>
-                <a:cs typeface="Instrument Sans"/>
-                <a:sym typeface="Instrument Sans"/>
-              </a:rPr>
-              <a:t>Valuation: $2.5B to $10B in 33 days;</a:t>
-            </a:r>
-          </a:p>
-          <a:p>
-            <a:pPr marL="0" marR="0" lvl="0" indent="0" algn="l" rtl="0">
-              <a:lnSpc>
-                <a:spcPct val="110000"/>
-              </a:lnSpc>
-              <a:spcBef>
-                <a:spcPts val="0"/>
-              </a:spcBef>
-              <a:spcAft>
-                <a:spcPts val="0"/>
-              </a:spcAft>
-              <a:buNone/>
-            </a:pPr>
-            <a:r>
-              <a:rPr lang="en-US" sz="1000" b="0" i="0" u="none" strike="noStrike" cap="none">
-                <a:solidFill>
-                  <a:srgbClr val="33322F"/>
-                </a:solidFill>
-                <a:latin typeface="Instrument Sans"/>
-                <a:ea typeface="Instrument Sans"/>
-                <a:cs typeface="Instrument Sans"/>
-                <a:sym typeface="Instrument Sans"/>
-              </a:rPr>
-              <a:t>Sequoia, Benchmark, Coatue</a:t>
-            </a:r>
-          </a:p>
-        </p:txBody>
-      </p:sp>
-      <p:sp>
-        <p:nvSpPr>
-          <p:cNvPr id="5018" name="SimReal 5018"/>
-          <p:cNvSpPr/>
-          <p:nvPr/>
-        </p:nvSpPr>
-        <p:spPr>
-          <a:xfrm>
-            <a:off x="9073134" y="1755648"/>
-            <a:ext cx="2567178" cy="18288"/>
-          </a:xfrm>
-          <a:prstGeom prst="rect">
-            <a:avLst/>
-          </a:prstGeom>
-          <a:solidFill>
-            <a:srgbClr val="111110"/>
-          </a:solidFill>
-          <a:ln>
-            <a:noFill/>
-          </a:ln>
-        </p:spPr>
-        <p:txBody>
-          <a:bodyPr/>
-          <a:lstStyle/>
-          <a:p>
-            <a:endParaRPr/>
-          </a:p>
-        </p:txBody>
-      </p:sp>
-      <p:sp>
-        <p:nvSpPr>
-          <p:cNvPr id="5019" name="SimReal 5019"/>
-          <p:cNvSpPr txBox="1"/>
-          <p:nvPr/>
-        </p:nvSpPr>
-        <p:spPr>
-          <a:xfrm>
-            <a:off x="9073134" y="1865376"/>
-            <a:ext cx="2567178" cy="201168"/>
-          </a:xfrm>
-          <a:prstGeom prst="rect">
-            <a:avLst/>
-          </a:prstGeom>
-          <a:noFill/>
-          <a:ln>
-            <a:noFill/>
-          </a:ln>
-        </p:spPr>
-        <p:txBody>
-          <a:bodyPr spcFirstLastPara="1" wrap="square" lIns="0" tIns="0" rIns="0" bIns="0" anchor="t" anchorCtr="0">
-            <a:noAutofit/>
-          </a:bodyPr>
-          <a:lstStyle/>
-          <a:p>
-            <a:pPr marL="0" marR="0" lvl="0" indent="0" algn="l" rtl="0">
-              <a:spcBef>
-                <a:spcPts val="0"/>
-              </a:spcBef>
-              <a:spcAft>
-                <a:spcPts val="0"/>
-              </a:spcAft>
-              <a:buNone/>
-            </a:pPr>
-            <a:r>
-              <a:rPr lang="en-US" sz="950" b="0" i="0" u="none" strike="noStrike" cap="none">
+              <a:t>Agents improve</a:t>
+            </a:r>
+            <a:r>
+              <a:rPr lang="en-US" sz="1600" b="0" i="0" u="none" strike="noStrike" cap="none">
                 <a:solidFill>
                   <a:srgbClr val="6E6C66"/>
                 </a:solidFill>
-                <a:latin typeface="IBM Plex Mono"/>
-                <a:ea typeface="IBM Plex Mono"/>
-                <a:cs typeface="IBM Plex Mono"/>
-                <a:sym typeface="IBM Plex Mono"/>
-              </a:rPr>
-              <a:t>Still falling short</a:t>
-            </a:r>
-          </a:p>
-        </p:txBody>
-      </p:sp>
-      <p:sp>
-        <p:nvSpPr>
-          <p:cNvPr id="5020" name="SimReal 5020"/>
-          <p:cNvSpPr txBox="1"/>
-          <p:nvPr/>
-        </p:nvSpPr>
-        <p:spPr>
-          <a:xfrm>
-            <a:off x="9073134" y="2084832"/>
-            <a:ext cx="2567178" cy="566928"/>
-          </a:xfrm>
-          <a:prstGeom prst="rect">
-            <a:avLst/>
-          </a:prstGeom>
-          <a:noFill/>
-          <a:ln>
-            <a:noFill/>
-          </a:ln>
-        </p:spPr>
-        <p:txBody>
-          <a:bodyPr spcFirstLastPara="1" wrap="square" lIns="0" tIns="0" rIns="0" bIns="0" anchor="t" anchorCtr="0">
-            <a:noAutofit/>
-          </a:bodyPr>
-          <a:lstStyle/>
-          <a:p>
-            <a:pPr marL="0" marR="0" lvl="0" indent="0" algn="l" rtl="0">
-              <a:spcBef>
-                <a:spcPts val="0"/>
-              </a:spcBef>
-              <a:spcAft>
-                <a:spcPts val="0"/>
-              </a:spcAft>
-              <a:buNone/>
-            </a:pPr>
-            <a:r>
-              <a:rPr lang="en-US" sz="3200" b="0" i="0" u="none" strike="noStrike" cap="none">
+                <a:latin typeface="Instrument Sans"/>
+                <a:ea typeface="Instrument Sans"/>
+                <a:cs typeface="Instrument Sans"/>
+                <a:sym typeface="Instrument Sans"/>
+              </a:rPr>
+              <a:t>   →   </a:t>
+            </a:r>
+            <a:r>
+              <a:rPr lang="en-US" sz="2200" b="0" i="0" u="none" strike="noStrike" cap="none">
                 <a:solidFill>
                   <a:srgbClr val="C2410C"/>
                 </a:solidFill>
@@ -31218,7 +31215,56 @@
                 <a:cs typeface="Newsreader"/>
                 <a:sym typeface="Newsreader"/>
               </a:rPr>
-              <a:t>16.1%</a:t>
+              <a:t>Data goes to labs</a:t>
+            </a:r>
+          </a:p>
+        </p:txBody>
+      </p:sp>
+      <p:sp>
+        <p:nvSpPr>
+          <p:cNvPr id="5020" name="SimReal 5020"/>
+          <p:cNvSpPr txBox="1"/>
+          <p:nvPr/>
+        </p:nvSpPr>
+        <p:spPr>
+          <a:xfrm>
+            <a:off x="548640" y="4297680"/>
+            <a:ext cx="11091672" cy="274320"/>
+          </a:xfrm>
+          <a:prstGeom prst="rect">
+            <a:avLst/>
+          </a:prstGeom>
+          <a:noFill/>
+          <a:ln>
+            <a:noFill/>
+          </a:ln>
+        </p:spPr>
+        <p:txBody>
+          <a:bodyPr spcFirstLastPara="1" wrap="square" lIns="0" tIns="0" rIns="0" bIns="0" anchor="t" anchorCtr="0">
+            <a:noAutofit/>
+          </a:bodyPr>
+          <a:lstStyle/>
+          <a:p>
+            <a:pPr marL="0" marR="0" lvl="0" indent="0" algn="l" rtl="0">
+              <a:spcBef>
+                <a:spcPts val="0"/>
+              </a:spcBef>
+              <a:spcAft>
+                <a:spcPts val="0"/>
+              </a:spcAft>
+              <a:buNone/>
+            </a:pPr>
+            <a:r>
+              <a:rPr lang="en-US" sz="1200" b="0" i="0" u="none" strike="noStrike" cap="none">
+                <a:solidFill>
+                  <a:srgbClr val="6E6C66"/>
+                </a:solidFill>
+                <a:latin typeface="Instrument Sans"/>
+                <a:ea typeface="Instrument Sans"/>
+                <a:cs typeface="Instrument Sans"/>
+                <a:sym typeface="Instrument Sans"/>
+              </a:rPr>
+              <a:t>Our trading world already runs this loop: Qwen3.8-27B traded up to 12% better. This round we open trading and event prediction to personal agents.</a:t>
             </a:r>
           </a:p>
         </p:txBody>
@@ -31231,86 +31277,8 @@
         </p:nvSpPr>
         <p:spPr>
           <a:xfrm>
-            <a:off x="9073134" y="2706624"/>
-            <a:ext cx="2567178" cy="457200"/>
-          </a:xfrm>
-          <a:prstGeom prst="rect">
-            <a:avLst/>
-          </a:prstGeom>
-          <a:noFill/>
-          <a:ln>
-            <a:noFill/>
-          </a:ln>
-        </p:spPr>
-        <p:txBody>
-          <a:bodyPr spcFirstLastPara="1" wrap="square" lIns="0" tIns="0" rIns="0" bIns="0" anchor="t" anchorCtr="0">
-            <a:noAutofit/>
-          </a:bodyPr>
-          <a:lstStyle/>
-          <a:p>
-            <a:pPr marL="0" marR="0" lvl="0" indent="0" algn="l" rtl="0">
-              <a:lnSpc>
-                <a:spcPct val="110000"/>
-              </a:lnSpc>
-              <a:spcBef>
-                <a:spcPts val="0"/>
-              </a:spcBef>
-              <a:spcAft>
-                <a:spcPts val="0"/>
-              </a:spcAft>
-              <a:buNone/>
-            </a:pPr>
-            <a:r>
-              <a:rPr lang="en-US" sz="1000" b="0" i="0" u="none" strike="noStrike" cap="none">
-                <a:solidFill>
-                  <a:srgbClr val="33322F"/>
-                </a:solidFill>
-                <a:latin typeface="Instrument Sans"/>
-                <a:ea typeface="Instrument Sans"/>
-                <a:cs typeface="Instrument Sans"/>
-                <a:sym typeface="Instrument Sans"/>
-              </a:rPr>
-              <a:t>The best model completes 16.1% of real</a:t>
-            </a:r>
-          </a:p>
-          <a:p>
-            <a:pPr marL="0" marR="0" lvl="0" indent="0" algn="l" rtl="0">
-              <a:lnSpc>
-                <a:spcPct val="110000"/>
-              </a:lnSpc>
-              <a:spcBef>
-                <a:spcPts val="0"/>
-              </a:spcBef>
-              <a:spcAft>
-                <a:spcPts val="0"/>
-              </a:spcAft>
-              <a:buNone/>
-            </a:pPr>
-            <a:r>
-              <a:rPr lang="en-US" sz="1000" b="0" i="0" u="none" strike="noStrike" cap="none">
-                <a:solidFill>
-                  <a:srgbClr val="33322F"/>
-                </a:solidFill>
-                <a:latin typeface="Instrument Sans"/>
-                <a:ea typeface="Instrument Sans"/>
-                <a:cs typeface="Instrument Sans"/>
-                <a:sym typeface="Instrument Sans"/>
-              </a:rPr>
-              <a:t>freelance projects (Remote Labor Index)</a:t>
-            </a:r>
-          </a:p>
-        </p:txBody>
-      </p:sp>
-      <p:sp>
-        <p:nvSpPr>
-          <p:cNvPr id="5022" name="SimReal 5022"/>
-          <p:cNvSpPr txBox="1"/>
-          <p:nvPr/>
-        </p:nvSpPr>
-        <p:spPr>
-          <a:xfrm>
-            <a:off x="548640" y="3255264"/>
-            <a:ext cx="7498080" cy="329184"/>
+            <a:off x="548640" y="5120640"/>
+            <a:ext cx="11091672" cy="420624"/>
           </a:xfrm>
           <a:prstGeom prst="rect">
             <a:avLst/>
@@ -31336,7 +31304,7 @@
               <a:buNone/>
             </a:pPr>
             <a:r>
-              <a:rPr lang="en-US" sz="1600" b="0" i="0" u="none" strike="noStrike" cap="none">
+              <a:rPr lang="en-US" sz="2400" b="0" i="0" u="none" strike="noStrike" cap="none">
                 <a:solidFill>
                   <a:srgbClr val="111110"/>
                 </a:solidFill>
@@ -31345,10 +31313,10 @@
                 <a:cs typeface="Newsreader"/>
                 <a:sym typeface="Newsreader"/>
               </a:rPr>
-              <a:t>What keeps the loop turning: </a:t>
-            </a:r>
-            <a:r>
-              <a:rPr lang="en-US" sz="1600" b="0" i="0" u="none" strike="noStrike" cap="none">
+              <a:t>Sandboxes keep agents out of trouble. </a:t>
+            </a:r>
+            <a:r>
+              <a:rPr lang="en-US" sz="2400" b="0" i="0" u="none" strike="noStrike" cap="none">
                 <a:solidFill>
                   <a:srgbClr val="C2410C"/>
                 </a:solidFill>
@@ -31357,174 +31325,10 @@
                 <a:cs typeface="Newsreader"/>
                 <a:sym typeface="Newsreader"/>
               </a:rPr>
-              <a:t>personal agents</a:t>
-            </a:r>
-          </a:p>
-        </p:txBody>
-      </p:sp>
-      <p:sp>
-        <p:nvSpPr>
-          <p:cNvPr id="5023" name="SimReal 5023"/>
-          <p:cNvSpPr txBox="1"/>
-          <p:nvPr/>
-        </p:nvSpPr>
-        <p:spPr>
-          <a:xfrm>
-            <a:off x="8046720" y="3255264"/>
-            <a:ext cx="3593592" cy="329184"/>
-          </a:xfrm>
-          <a:prstGeom prst="rect">
-            <a:avLst/>
-          </a:prstGeom>
-          <a:noFill/>
-          <a:ln>
-            <a:noFill/>
-          </a:ln>
-        </p:spPr>
-        <p:txBody>
-          <a:bodyPr spcFirstLastPara="1" wrap="square" lIns="0" tIns="0" rIns="0" bIns="0" anchor="ctr" anchorCtr="0">
-            <a:noAutofit/>
-          </a:bodyPr>
-          <a:lstStyle/>
-          <a:p>
-            <a:pPr marL="0" marR="0" lvl="0" indent="0" algn="r" rtl="0">
-              <a:spcBef>
-                <a:spcPts val="0"/>
-              </a:spcBef>
-              <a:spcAft>
-                <a:spcPts val="0"/>
-              </a:spcAft>
-              <a:buNone/>
-            </a:pPr>
-            <a:r>
-              <a:rPr lang="en-US" sz="900" b="0" i="0" u="none" strike="noStrike" cap="none">
-                <a:solidFill>
-                  <a:srgbClr val="6E6C66"/>
-                </a:solidFill>
-                <a:latin typeface="Instrument Sans"/>
-                <a:ea typeface="Instrument Sans"/>
-                <a:cs typeface="Instrument Sans"/>
-                <a:sym typeface="Instrument Sans"/>
-              </a:rPr>
-              <a:t>Dark: proven in Xitadel  ·  Light: planned this round</a:t>
-            </a:r>
-          </a:p>
-        </p:txBody>
-      </p:sp>
-      <p:sp>
-        <p:nvSpPr>
-          <p:cNvPr id="5024" name="SimReal 5024"/>
-          <p:cNvSpPr/>
-          <p:nvPr/>
-        </p:nvSpPr>
-        <p:spPr>
-          <a:xfrm>
-            <a:off x="548640" y="3639312"/>
-            <a:ext cx="1998878" cy="1097280"/>
-          </a:xfrm>
-          <a:prstGeom prst="rect">
-            <a:avLst/>
-          </a:prstGeom>
-          <a:solidFill>
-            <a:srgbClr val="F2F1EC"/>
-          </a:solidFill>
-          <a:ln>
-            <a:noFill/>
-          </a:ln>
-        </p:spPr>
-        <p:txBody>
-          <a:bodyPr/>
-          <a:lstStyle/>
-          <a:p>
-            <a:endParaRPr/>
-          </a:p>
-        </p:txBody>
-      </p:sp>
-      <p:sp>
-        <p:nvSpPr>
-          <p:cNvPr id="5025" name="SimReal 5025"/>
-          <p:cNvSpPr txBox="1"/>
-          <p:nvPr/>
-        </p:nvSpPr>
-        <p:spPr>
-          <a:xfrm>
-            <a:off x="713232" y="3749040"/>
-            <a:ext cx="1724558" cy="182880"/>
-          </a:xfrm>
-          <a:prstGeom prst="rect">
-            <a:avLst/>
-          </a:prstGeom>
-          <a:noFill/>
-          <a:ln>
-            <a:noFill/>
-          </a:ln>
-        </p:spPr>
-        <p:txBody>
-          <a:bodyPr spcFirstLastPara="1" wrap="square" lIns="0" tIns="0" rIns="0" bIns="0" anchor="t" anchorCtr="0">
-            <a:noAutofit/>
-          </a:bodyPr>
-          <a:lstStyle/>
-          <a:p>
-            <a:pPr marL="0" marR="0" lvl="0" indent="0" algn="l" rtl="0">
-              <a:spcBef>
-                <a:spcPts val="0"/>
-              </a:spcBef>
-              <a:spcAft>
-                <a:spcPts val="0"/>
-              </a:spcAft>
-              <a:buNone/>
-            </a:pPr>
-            <a:r>
-              <a:rPr lang="en-US" sz="900" b="0" i="0" u="none" strike="noStrike" cap="none">
-                <a:solidFill>
-                  <a:srgbClr val="C2410C"/>
-                </a:solidFill>
-                <a:latin typeface="IBM Plex Mono"/>
-                <a:ea typeface="IBM Plex Mono"/>
-                <a:cs typeface="IBM Plex Mono"/>
-                <a:sym typeface="IBM Plex Mono"/>
-              </a:rPr>
-              <a:t>Planned</a:t>
-            </a:r>
-          </a:p>
-        </p:txBody>
-      </p:sp>
-      <p:sp>
-        <p:nvSpPr>
-          <p:cNvPr id="5026" name="SimReal 5026"/>
-          <p:cNvSpPr txBox="1"/>
-          <p:nvPr/>
-        </p:nvSpPr>
-        <p:spPr>
-          <a:xfrm>
-            <a:off x="713232" y="3968496"/>
-            <a:ext cx="1724558" cy="310896"/>
-          </a:xfrm>
-          <a:prstGeom prst="rect">
-            <a:avLst/>
-          </a:prstGeom>
-          <a:noFill/>
-          <a:ln>
-            <a:noFill/>
-          </a:ln>
-        </p:spPr>
-        <p:txBody>
-          <a:bodyPr spcFirstLastPara="1" wrap="square" lIns="0" tIns="0" rIns="0" bIns="0" anchor="t" anchorCtr="0">
-            <a:noAutofit/>
-          </a:bodyPr>
-          <a:lstStyle/>
-          <a:p>
-            <a:pPr marL="0" marR="0" lvl="0" indent="0" algn="l" rtl="0">
-              <a:spcBef>
-                <a:spcPts val="0"/>
-              </a:spcBef>
-              <a:spcAft>
-                <a:spcPts val="0"/>
-              </a:spcAft>
-              <a:buNone/>
-            </a:pPr>
-            <a:r>
-              <a:rPr lang="en-US" sz="1500" b="0" i="0" u="none" strike="noStrike" cap="none">
+              <a:t>We teach them to get it right</a:t>
+            </a:r>
+            <a:r>
+              <a:rPr lang="en-US" sz="2400" b="0" i="0" u="none" strike="noStrike" cap="none">
                 <a:solidFill>
                   <a:srgbClr val="111110"/>
                 </a:solidFill>
@@ -31533,1370 +31337,6 @@
                 <a:cs typeface="Newsreader"/>
                 <a:sym typeface="Newsreader"/>
               </a:rPr>
-              <a:t>Practice</a:t>
-            </a:r>
-          </a:p>
-        </p:txBody>
-      </p:sp>
-      <p:sp>
-        <p:nvSpPr>
-          <p:cNvPr id="5027" name="SimReal 5027"/>
-          <p:cNvSpPr txBox="1"/>
-          <p:nvPr/>
-        </p:nvSpPr>
-        <p:spPr>
-          <a:xfrm>
-            <a:off x="713232" y="4315968"/>
-            <a:ext cx="1724558" cy="365760"/>
-          </a:xfrm>
-          <a:prstGeom prst="rect">
-            <a:avLst/>
-          </a:prstGeom>
-          <a:noFill/>
-          <a:ln>
-            <a:noFill/>
-          </a:ln>
-        </p:spPr>
-        <p:txBody>
-          <a:bodyPr spcFirstLastPara="1" wrap="square" lIns="0" tIns="0" rIns="0" bIns="0" anchor="t" anchorCtr="0">
-            <a:noAutofit/>
-          </a:bodyPr>
-          <a:lstStyle/>
-          <a:p>
-            <a:pPr marL="0" marR="0" lvl="0" indent="0" algn="l" rtl="0">
-              <a:lnSpc>
-                <a:spcPct val="110000"/>
-              </a:lnSpc>
-              <a:spcBef>
-                <a:spcPts val="0"/>
-              </a:spcBef>
-              <a:spcAft>
-                <a:spcPts val="0"/>
-              </a:spcAft>
-              <a:buNone/>
-            </a:pPr>
-            <a:r>
-              <a:rPr lang="en-US" sz="950" b="0" i="0" u="none" strike="noStrike" cap="none">
-                <a:solidFill>
-                  <a:srgbClr val="33322F"/>
-                </a:solidFill>
-                <a:latin typeface="Instrument Sans"/>
-                <a:ea typeface="Instrument Sans"/>
-                <a:cs typeface="Instrument Sans"/>
-                <a:sym typeface="Instrument Sans"/>
-              </a:rPr>
-              <a:t>Trading and prediction first;</a:t>
-            </a:r>
-          </a:p>
-          <a:p>
-            <a:pPr marL="0" marR="0" lvl="0" indent="0" algn="l" rtl="0">
-              <a:lnSpc>
-                <a:spcPct val="110000"/>
-              </a:lnSpc>
-              <a:spcBef>
-                <a:spcPts val="0"/>
-              </a:spcBef>
-              <a:spcAft>
-                <a:spcPts val="0"/>
-              </a:spcAft>
-              <a:buNone/>
-            </a:pPr>
-            <a:r>
-              <a:rPr lang="en-US" sz="950" b="0" i="0" u="none" strike="noStrike" cap="none">
-                <a:solidFill>
-                  <a:srgbClr val="33322F"/>
-                </a:solidFill>
-                <a:latin typeface="Instrument Sans"/>
-                <a:ea typeface="Instrument Sans"/>
-                <a:cs typeface="Instrument Sans"/>
-                <a:sym typeface="Instrument Sans"/>
-              </a:rPr>
-              <a:t>held-out sets stay closed</a:t>
-            </a:r>
-          </a:p>
-        </p:txBody>
-      </p:sp>
-      <p:sp>
-        <p:nvSpPr>
-          <p:cNvPr id="5028" name="SimReal 5028"/>
-          <p:cNvSpPr txBox="1"/>
-          <p:nvPr/>
-        </p:nvSpPr>
-        <p:spPr>
-          <a:xfrm>
-            <a:off x="2547518" y="3639312"/>
-            <a:ext cx="274320" cy="1097280"/>
-          </a:xfrm>
-          <a:prstGeom prst="rect">
-            <a:avLst/>
-          </a:prstGeom>
-          <a:noFill/>
-          <a:ln>
-            <a:noFill/>
-          </a:ln>
-        </p:spPr>
-        <p:txBody>
-          <a:bodyPr spcFirstLastPara="1" wrap="square" lIns="0" tIns="0" rIns="0" bIns="0" anchor="ctr" anchorCtr="0">
-            <a:noAutofit/>
-          </a:bodyPr>
-          <a:lstStyle/>
-          <a:p>
-            <a:pPr marL="0" marR="0" lvl="0" indent="0" algn="ctr" rtl="0">
-              <a:spcBef>
-                <a:spcPts val="0"/>
-              </a:spcBef>
-              <a:spcAft>
-                <a:spcPts val="0"/>
-              </a:spcAft>
-              <a:buNone/>
-            </a:pPr>
-            <a:r>
-              <a:rPr lang="en-US" sz="1200" b="0" i="0" u="none" strike="noStrike" cap="none">
-                <a:solidFill>
-                  <a:srgbClr val="6E6C66"/>
-                </a:solidFill>
-                <a:latin typeface="Instrument Sans"/>
-                <a:ea typeface="Instrument Sans"/>
-                <a:cs typeface="Instrument Sans"/>
-                <a:sym typeface="Instrument Sans"/>
-              </a:rPr>
-              <a:t>→</a:t>
-            </a:r>
-          </a:p>
-        </p:txBody>
-      </p:sp>
-      <p:sp>
-        <p:nvSpPr>
-          <p:cNvPr id="5029" name="SimReal 5029"/>
-          <p:cNvSpPr/>
-          <p:nvPr/>
-        </p:nvSpPr>
-        <p:spPr>
-          <a:xfrm>
-            <a:off x="2821838" y="3639312"/>
-            <a:ext cx="1998878" cy="1097280"/>
-          </a:xfrm>
-          <a:prstGeom prst="rect">
-            <a:avLst/>
-          </a:prstGeom>
-          <a:solidFill>
-            <a:srgbClr val="111110"/>
-          </a:solidFill>
-          <a:ln>
-            <a:noFill/>
-          </a:ln>
-        </p:spPr>
-        <p:txBody>
-          <a:bodyPr/>
-          <a:lstStyle/>
-          <a:p>
-            <a:endParaRPr/>
-          </a:p>
-        </p:txBody>
-      </p:sp>
-      <p:sp>
-        <p:nvSpPr>
-          <p:cNvPr id="5030" name="SimReal 5030"/>
-          <p:cNvSpPr txBox="1"/>
-          <p:nvPr/>
-        </p:nvSpPr>
-        <p:spPr>
-          <a:xfrm>
-            <a:off x="2986430" y="3749040"/>
-            <a:ext cx="1724558" cy="182880"/>
-          </a:xfrm>
-          <a:prstGeom prst="rect">
-            <a:avLst/>
-          </a:prstGeom>
-          <a:noFill/>
-          <a:ln>
-            <a:noFill/>
-          </a:ln>
-        </p:spPr>
-        <p:txBody>
-          <a:bodyPr spcFirstLastPara="1" wrap="square" lIns="0" tIns="0" rIns="0" bIns="0" anchor="t" anchorCtr="0">
-            <a:noAutofit/>
-          </a:bodyPr>
-          <a:lstStyle/>
-          <a:p>
-            <a:pPr marL="0" marR="0" lvl="0" indent="0" algn="l" rtl="0">
-              <a:spcBef>
-                <a:spcPts val="0"/>
-              </a:spcBef>
-              <a:spcAft>
-                <a:spcPts val="0"/>
-              </a:spcAft>
-              <a:buNone/>
-            </a:pPr>
-            <a:r>
-              <a:rPr lang="en-US" sz="900" b="0" i="0" u="none" strike="noStrike" cap="none">
-                <a:solidFill>
-                  <a:srgbClr val="E27A3F"/>
-                </a:solidFill>
-                <a:latin typeface="IBM Plex Mono"/>
-                <a:ea typeface="IBM Plex Mono"/>
-                <a:cs typeface="IBM Plex Mono"/>
-                <a:sym typeface="IBM Plex Mono"/>
-              </a:rPr>
-              <a:t>Proven</a:t>
-            </a:r>
-          </a:p>
-        </p:txBody>
-      </p:sp>
-      <p:sp>
-        <p:nvSpPr>
-          <p:cNvPr id="5031" name="SimReal 5031"/>
-          <p:cNvSpPr txBox="1"/>
-          <p:nvPr/>
-        </p:nvSpPr>
-        <p:spPr>
-          <a:xfrm>
-            <a:off x="2986430" y="3968496"/>
-            <a:ext cx="1724558" cy="310896"/>
-          </a:xfrm>
-          <a:prstGeom prst="rect">
-            <a:avLst/>
-          </a:prstGeom>
-          <a:noFill/>
-          <a:ln>
-            <a:noFill/>
-          </a:ln>
-        </p:spPr>
-        <p:txBody>
-          <a:bodyPr spcFirstLastPara="1" wrap="square" lIns="0" tIns="0" rIns="0" bIns="0" anchor="t" anchorCtr="0">
-            <a:noAutofit/>
-          </a:bodyPr>
-          <a:lstStyle/>
-          <a:p>
-            <a:pPr marL="0" marR="0" lvl="0" indent="0" algn="l" rtl="0">
-              <a:spcBef>
-                <a:spcPts val="0"/>
-              </a:spcBef>
-              <a:spcAft>
-                <a:spcPts val="0"/>
-              </a:spcAft>
-              <a:buNone/>
-            </a:pPr>
-            <a:r>
-              <a:rPr lang="en-US" sz="1500" b="0" i="0" u="none" strike="noStrike" cap="none">
-                <a:solidFill>
-                  <a:srgbClr val="FAF9F6"/>
-                </a:solidFill>
-                <a:latin typeface="Newsreader"/>
-                <a:ea typeface="Newsreader"/>
-                <a:cs typeface="Newsreader"/>
-                <a:sym typeface="Newsreader"/>
-              </a:rPr>
-              <a:t>Outcomes settle</a:t>
-            </a:r>
-          </a:p>
-        </p:txBody>
-      </p:sp>
-      <p:sp>
-        <p:nvSpPr>
-          <p:cNvPr id="5032" name="SimReal 5032"/>
-          <p:cNvSpPr txBox="1"/>
-          <p:nvPr/>
-        </p:nvSpPr>
-        <p:spPr>
-          <a:xfrm>
-            <a:off x="2986430" y="4315968"/>
-            <a:ext cx="1724558" cy="365760"/>
-          </a:xfrm>
-          <a:prstGeom prst="rect">
-            <a:avLst/>
-          </a:prstGeom>
-          <a:noFill/>
-          <a:ln>
-            <a:noFill/>
-          </a:ln>
-        </p:spPr>
-        <p:txBody>
-          <a:bodyPr spcFirstLastPara="1" wrap="square" lIns="0" tIns="0" rIns="0" bIns="0" anchor="t" anchorCtr="0">
-            <a:noAutofit/>
-          </a:bodyPr>
-          <a:lstStyle/>
-          <a:p>
-            <a:pPr marL="0" marR="0" lvl="0" indent="0" algn="l" rtl="0">
-              <a:lnSpc>
-                <a:spcPct val="110000"/>
-              </a:lnSpc>
-              <a:spcBef>
-                <a:spcPts val="0"/>
-              </a:spcBef>
-              <a:spcAft>
-                <a:spcPts val="0"/>
-              </a:spcAft>
-              <a:buNone/>
-            </a:pPr>
-            <a:r>
-              <a:rPr lang="en-US" sz="950" b="0" i="0" u="none" strike="noStrike" cap="none">
-                <a:solidFill>
-                  <a:srgbClr val="C4C0B7"/>
-                </a:solidFill>
-                <a:latin typeface="Instrument Sans"/>
-                <a:ea typeface="Instrument Sans"/>
-                <a:cs typeface="Instrument Sans"/>
-                <a:sym typeface="Instrument Sans"/>
-              </a:rPr>
-              <a:t>The market settles every</a:t>
-            </a:r>
-          </a:p>
-          <a:p>
-            <a:pPr marL="0" marR="0" lvl="0" indent="0" algn="l" rtl="0">
-              <a:lnSpc>
-                <a:spcPct val="110000"/>
-              </a:lnSpc>
-              <a:spcBef>
-                <a:spcPts val="0"/>
-              </a:spcBef>
-              <a:spcAft>
-                <a:spcPts val="0"/>
-              </a:spcAft>
-              <a:buNone/>
-            </a:pPr>
-            <a:r>
-              <a:rPr lang="en-US" sz="950" b="0" i="0" u="none" strike="noStrike" cap="none">
-                <a:solidFill>
-                  <a:srgbClr val="C4C0B7"/>
-                </a:solidFill>
-                <a:latin typeface="Instrument Sans"/>
-                <a:ea typeface="Instrument Sans"/>
-                <a:cs typeface="Instrument Sans"/>
-                <a:sym typeface="Instrument Sans"/>
-              </a:rPr>
-              <a:t>trade; trajectories kept</a:t>
-            </a:r>
-          </a:p>
-        </p:txBody>
-      </p:sp>
-      <p:sp>
-        <p:nvSpPr>
-          <p:cNvPr id="5033" name="SimReal 5033"/>
-          <p:cNvSpPr txBox="1"/>
-          <p:nvPr/>
-        </p:nvSpPr>
-        <p:spPr>
-          <a:xfrm>
-            <a:off x="4820717" y="3639312"/>
-            <a:ext cx="274320" cy="1097280"/>
-          </a:xfrm>
-          <a:prstGeom prst="rect">
-            <a:avLst/>
-          </a:prstGeom>
-          <a:noFill/>
-          <a:ln>
-            <a:noFill/>
-          </a:ln>
-        </p:spPr>
-        <p:txBody>
-          <a:bodyPr spcFirstLastPara="1" wrap="square" lIns="0" tIns="0" rIns="0" bIns="0" anchor="ctr" anchorCtr="0">
-            <a:noAutofit/>
-          </a:bodyPr>
-          <a:lstStyle/>
-          <a:p>
-            <a:pPr marL="0" marR="0" lvl="0" indent="0" algn="ctr" rtl="0">
-              <a:spcBef>
-                <a:spcPts val="0"/>
-              </a:spcBef>
-              <a:spcAft>
-                <a:spcPts val="0"/>
-              </a:spcAft>
-              <a:buNone/>
-            </a:pPr>
-            <a:r>
-              <a:rPr lang="en-US" sz="1200" b="0" i="0" u="none" strike="noStrike" cap="none">
-                <a:solidFill>
-                  <a:srgbClr val="6E6C66"/>
-                </a:solidFill>
-                <a:latin typeface="Instrument Sans"/>
-                <a:ea typeface="Instrument Sans"/>
-                <a:cs typeface="Instrument Sans"/>
-                <a:sym typeface="Instrument Sans"/>
-              </a:rPr>
-              <a:t>→</a:t>
-            </a:r>
-          </a:p>
-        </p:txBody>
-      </p:sp>
-      <p:sp>
-        <p:nvSpPr>
-          <p:cNvPr id="5034" name="SimReal 5034"/>
-          <p:cNvSpPr/>
-          <p:nvPr/>
-        </p:nvSpPr>
-        <p:spPr>
-          <a:xfrm>
-            <a:off x="5095037" y="3639312"/>
-            <a:ext cx="1998878" cy="1097280"/>
-          </a:xfrm>
-          <a:prstGeom prst="rect">
-            <a:avLst/>
-          </a:prstGeom>
-          <a:solidFill>
-            <a:srgbClr val="111110"/>
-          </a:solidFill>
-          <a:ln>
-            <a:noFill/>
-          </a:ln>
-        </p:spPr>
-        <p:txBody>
-          <a:bodyPr/>
-          <a:lstStyle/>
-          <a:p>
-            <a:endParaRPr/>
-          </a:p>
-        </p:txBody>
-      </p:sp>
-      <p:sp>
-        <p:nvSpPr>
-          <p:cNvPr id="5035" name="SimReal 5035"/>
-          <p:cNvSpPr txBox="1"/>
-          <p:nvPr/>
-        </p:nvSpPr>
-        <p:spPr>
-          <a:xfrm>
-            <a:off x="5259629" y="3749040"/>
-            <a:ext cx="1724558" cy="182880"/>
-          </a:xfrm>
-          <a:prstGeom prst="rect">
-            <a:avLst/>
-          </a:prstGeom>
-          <a:noFill/>
-          <a:ln>
-            <a:noFill/>
-          </a:ln>
-        </p:spPr>
-        <p:txBody>
-          <a:bodyPr spcFirstLastPara="1" wrap="square" lIns="0" tIns="0" rIns="0" bIns="0" anchor="t" anchorCtr="0">
-            <a:noAutofit/>
-          </a:bodyPr>
-          <a:lstStyle/>
-          <a:p>
-            <a:pPr marL="0" marR="0" lvl="0" indent="0" algn="l" rtl="0">
-              <a:spcBef>
-                <a:spcPts val="0"/>
-              </a:spcBef>
-              <a:spcAft>
-                <a:spcPts val="0"/>
-              </a:spcAft>
-              <a:buNone/>
-            </a:pPr>
-            <a:r>
-              <a:rPr lang="en-US" sz="900" b="0" i="0" u="none" strike="noStrike" cap="none">
-                <a:solidFill>
-                  <a:srgbClr val="E27A3F"/>
-                </a:solidFill>
-                <a:latin typeface="IBM Plex Mono"/>
-                <a:ea typeface="IBM Plex Mono"/>
-                <a:cs typeface="IBM Plex Mono"/>
-                <a:sym typeface="IBM Plex Mono"/>
-              </a:rPr>
-              <a:t>Proven</a:t>
-            </a:r>
-          </a:p>
-        </p:txBody>
-      </p:sp>
-      <p:sp>
-        <p:nvSpPr>
-          <p:cNvPr id="5036" name="SimReal 5036"/>
-          <p:cNvSpPr txBox="1"/>
-          <p:nvPr/>
-        </p:nvSpPr>
-        <p:spPr>
-          <a:xfrm>
-            <a:off x="5259629" y="3968496"/>
-            <a:ext cx="1724558" cy="310896"/>
-          </a:xfrm>
-          <a:prstGeom prst="rect">
-            <a:avLst/>
-          </a:prstGeom>
-          <a:noFill/>
-          <a:ln>
-            <a:noFill/>
-          </a:ln>
-        </p:spPr>
-        <p:txBody>
-          <a:bodyPr spcFirstLastPara="1" wrap="square" lIns="0" tIns="0" rIns="0" bIns="0" anchor="t" anchorCtr="0">
-            <a:noAutofit/>
-          </a:bodyPr>
-          <a:lstStyle/>
-          <a:p>
-            <a:pPr marL="0" marR="0" lvl="0" indent="0" algn="l" rtl="0">
-              <a:spcBef>
-                <a:spcPts val="0"/>
-              </a:spcBef>
-              <a:spcAft>
-                <a:spcPts val="0"/>
-              </a:spcAft>
-              <a:buNone/>
-            </a:pPr>
-            <a:r>
-              <a:rPr lang="en-US" sz="1500" b="0" i="0" u="none" strike="noStrike" cap="none">
-                <a:solidFill>
-                  <a:srgbClr val="FAF9F6"/>
-                </a:solidFill>
-                <a:latin typeface="Newsreader"/>
-                <a:ea typeface="Newsreader"/>
-                <a:cs typeface="Newsreader"/>
-                <a:sym typeface="Newsreader"/>
-              </a:rPr>
-              <a:t>Agents improve</a:t>
-            </a:r>
-          </a:p>
-        </p:txBody>
-      </p:sp>
-      <p:sp>
-        <p:nvSpPr>
-          <p:cNvPr id="5037" name="SimReal 5037"/>
-          <p:cNvSpPr txBox="1"/>
-          <p:nvPr/>
-        </p:nvSpPr>
-        <p:spPr>
-          <a:xfrm>
-            <a:off x="5259629" y="4315968"/>
-            <a:ext cx="1724558" cy="365760"/>
-          </a:xfrm>
-          <a:prstGeom prst="rect">
-            <a:avLst/>
-          </a:prstGeom>
-          <a:noFill/>
-          <a:ln>
-            <a:noFill/>
-          </a:ln>
-        </p:spPr>
-        <p:txBody>
-          <a:bodyPr spcFirstLastPara="1" wrap="square" lIns="0" tIns="0" rIns="0" bIns="0" anchor="t" anchorCtr="0">
-            <a:noAutofit/>
-          </a:bodyPr>
-          <a:lstStyle/>
-          <a:p>
-            <a:pPr marL="0" marR="0" lvl="0" indent="0" algn="l" rtl="0">
-              <a:lnSpc>
-                <a:spcPct val="110000"/>
-              </a:lnSpc>
-              <a:spcBef>
-                <a:spcPts val="0"/>
-              </a:spcBef>
-              <a:spcAft>
-                <a:spcPts val="0"/>
-              </a:spcAft>
-              <a:buNone/>
-            </a:pPr>
-            <a:r>
-              <a:rPr lang="en-US" sz="950" b="0" i="0" u="none" strike="noStrike" cap="none">
-                <a:solidFill>
-                  <a:srgbClr val="C4C0B7"/>
-                </a:solidFill>
-                <a:latin typeface="Instrument Sans"/>
-                <a:ea typeface="Instrument Sans"/>
-                <a:cs typeface="Instrument Sans"/>
-                <a:sym typeface="Instrument Sans"/>
-              </a:rPr>
-              <a:t>After training, Qwen3.8-27B</a:t>
-            </a:r>
-          </a:p>
-          <a:p>
-            <a:pPr marL="0" marR="0" lvl="0" indent="0" algn="l" rtl="0">
-              <a:lnSpc>
-                <a:spcPct val="110000"/>
-              </a:lnSpc>
-              <a:spcBef>
-                <a:spcPts val="0"/>
-              </a:spcBef>
-              <a:spcAft>
-                <a:spcPts val="0"/>
-              </a:spcAft>
-              <a:buNone/>
-            </a:pPr>
-            <a:r>
-              <a:rPr lang="en-US" sz="950" b="0" i="0" u="none" strike="noStrike" cap="none">
-                <a:solidFill>
-                  <a:srgbClr val="C4C0B7"/>
-                </a:solidFill>
-                <a:latin typeface="Instrument Sans"/>
-                <a:ea typeface="Instrument Sans"/>
-                <a:cs typeface="Instrument Sans"/>
-                <a:sym typeface="Instrument Sans"/>
-              </a:rPr>
-              <a:t>traded up to 12% better</a:t>
-            </a:r>
-          </a:p>
-        </p:txBody>
-      </p:sp>
-      <p:sp>
-        <p:nvSpPr>
-          <p:cNvPr id="5038" name="SimReal 5038"/>
-          <p:cNvSpPr txBox="1"/>
-          <p:nvPr/>
-        </p:nvSpPr>
-        <p:spPr>
-          <a:xfrm>
-            <a:off x="7093915" y="3639312"/>
-            <a:ext cx="274320" cy="1097280"/>
-          </a:xfrm>
-          <a:prstGeom prst="rect">
-            <a:avLst/>
-          </a:prstGeom>
-          <a:noFill/>
-          <a:ln>
-            <a:noFill/>
-          </a:ln>
-        </p:spPr>
-        <p:txBody>
-          <a:bodyPr spcFirstLastPara="1" wrap="square" lIns="0" tIns="0" rIns="0" bIns="0" anchor="ctr" anchorCtr="0">
-            <a:noAutofit/>
-          </a:bodyPr>
-          <a:lstStyle/>
-          <a:p>
-            <a:pPr marL="0" marR="0" lvl="0" indent="0" algn="ctr" rtl="0">
-              <a:spcBef>
-                <a:spcPts val="0"/>
-              </a:spcBef>
-              <a:spcAft>
-                <a:spcPts val="0"/>
-              </a:spcAft>
-              <a:buNone/>
-            </a:pPr>
-            <a:r>
-              <a:rPr lang="en-US" sz="1200" b="0" i="0" u="none" strike="noStrike" cap="none">
-                <a:solidFill>
-                  <a:srgbClr val="6E6C66"/>
-                </a:solidFill>
-                <a:latin typeface="Instrument Sans"/>
-                <a:ea typeface="Instrument Sans"/>
-                <a:cs typeface="Instrument Sans"/>
-                <a:sym typeface="Instrument Sans"/>
-              </a:rPr>
-              <a:t>→</a:t>
-            </a:r>
-          </a:p>
-        </p:txBody>
-      </p:sp>
-      <p:sp>
-        <p:nvSpPr>
-          <p:cNvPr id="5039" name="SimReal 5039"/>
-          <p:cNvSpPr/>
-          <p:nvPr/>
-        </p:nvSpPr>
-        <p:spPr>
-          <a:xfrm>
-            <a:off x="7368235" y="3639312"/>
-            <a:ext cx="1998878" cy="1097280"/>
-          </a:xfrm>
-          <a:prstGeom prst="rect">
-            <a:avLst/>
-          </a:prstGeom>
-          <a:solidFill>
-            <a:srgbClr val="F2F1EC"/>
-          </a:solidFill>
-          <a:ln>
-            <a:noFill/>
-          </a:ln>
-        </p:spPr>
-        <p:txBody>
-          <a:bodyPr/>
-          <a:lstStyle/>
-          <a:p>
-            <a:endParaRPr/>
-          </a:p>
-        </p:txBody>
-      </p:sp>
-      <p:sp>
-        <p:nvSpPr>
-          <p:cNvPr id="5040" name="SimReal 5040"/>
-          <p:cNvSpPr txBox="1"/>
-          <p:nvPr/>
-        </p:nvSpPr>
-        <p:spPr>
-          <a:xfrm>
-            <a:off x="7532827" y="3749040"/>
-            <a:ext cx="1724558" cy="182880"/>
-          </a:xfrm>
-          <a:prstGeom prst="rect">
-            <a:avLst/>
-          </a:prstGeom>
-          <a:noFill/>
-          <a:ln>
-            <a:noFill/>
-          </a:ln>
-        </p:spPr>
-        <p:txBody>
-          <a:bodyPr spcFirstLastPara="1" wrap="square" lIns="0" tIns="0" rIns="0" bIns="0" anchor="t" anchorCtr="0">
-            <a:noAutofit/>
-          </a:bodyPr>
-          <a:lstStyle/>
-          <a:p>
-            <a:pPr marL="0" marR="0" lvl="0" indent="0" algn="l" rtl="0">
-              <a:spcBef>
-                <a:spcPts val="0"/>
-              </a:spcBef>
-              <a:spcAft>
-                <a:spcPts val="0"/>
-              </a:spcAft>
-              <a:buNone/>
-            </a:pPr>
-            <a:r>
-              <a:rPr lang="en-US" sz="900" b="0" i="0" u="none" strike="noStrike" cap="none">
-                <a:solidFill>
-                  <a:srgbClr val="C2410C"/>
-                </a:solidFill>
-                <a:latin typeface="IBM Plex Mono"/>
-                <a:ea typeface="IBM Plex Mono"/>
-                <a:cs typeface="IBM Plex Mono"/>
-                <a:sym typeface="IBM Plex Mono"/>
-              </a:rPr>
-              <a:t>Planned</a:t>
-            </a:r>
-          </a:p>
-        </p:txBody>
-      </p:sp>
-      <p:sp>
-        <p:nvSpPr>
-          <p:cNvPr id="5041" name="SimReal 5041"/>
-          <p:cNvSpPr txBox="1"/>
-          <p:nvPr/>
-        </p:nvSpPr>
-        <p:spPr>
-          <a:xfrm>
-            <a:off x="7532827" y="3968496"/>
-            <a:ext cx="1724558" cy="310896"/>
-          </a:xfrm>
-          <a:prstGeom prst="rect">
-            <a:avLst/>
-          </a:prstGeom>
-          <a:noFill/>
-          <a:ln>
-            <a:noFill/>
-          </a:ln>
-        </p:spPr>
-        <p:txBody>
-          <a:bodyPr spcFirstLastPara="1" wrap="square" lIns="0" tIns="0" rIns="0" bIns="0" anchor="t" anchorCtr="0">
-            <a:noAutofit/>
-          </a:bodyPr>
-          <a:lstStyle/>
-          <a:p>
-            <a:pPr marL="0" marR="0" lvl="0" indent="0" algn="l" rtl="0">
-              <a:spcBef>
-                <a:spcPts val="0"/>
-              </a:spcBef>
-              <a:spcAft>
-                <a:spcPts val="0"/>
-              </a:spcAft>
-              <a:buNone/>
-            </a:pPr>
-            <a:r>
-              <a:rPr lang="en-US" sz="1500" b="0" i="0" u="none" strike="noStrike" cap="none">
-                <a:solidFill>
-                  <a:srgbClr val="111110"/>
-                </a:solidFill>
-                <a:latin typeface="Newsreader"/>
-                <a:ea typeface="Newsreader"/>
-                <a:cs typeface="Newsreader"/>
-                <a:sym typeface="Newsreader"/>
-              </a:rPr>
-              <a:t>Worlds get real</a:t>
-            </a:r>
-          </a:p>
-        </p:txBody>
-      </p:sp>
-      <p:sp>
-        <p:nvSpPr>
-          <p:cNvPr id="5042" name="SimReal 5042"/>
-          <p:cNvSpPr txBox="1"/>
-          <p:nvPr/>
-        </p:nvSpPr>
-        <p:spPr>
-          <a:xfrm>
-            <a:off x="7532827" y="4315968"/>
-            <a:ext cx="1724558" cy="365760"/>
-          </a:xfrm>
-          <a:prstGeom prst="rect">
-            <a:avLst/>
-          </a:prstGeom>
-          <a:noFill/>
-          <a:ln>
-            <a:noFill/>
-          </a:ln>
-        </p:spPr>
-        <p:txBody>
-          <a:bodyPr spcFirstLastPara="1" wrap="square" lIns="0" tIns="0" rIns="0" bIns="0" anchor="t" anchorCtr="0">
-            <a:noAutofit/>
-          </a:bodyPr>
-          <a:lstStyle/>
-          <a:p>
-            <a:pPr marL="0" marR="0" lvl="0" indent="0" algn="l" rtl="0">
-              <a:lnSpc>
-                <a:spcPct val="110000"/>
-              </a:lnSpc>
-              <a:spcBef>
-                <a:spcPts val="0"/>
-              </a:spcBef>
-              <a:spcAft>
-                <a:spcPts val="0"/>
-              </a:spcAft>
-              <a:buNone/>
-            </a:pPr>
-            <a:r>
-              <a:rPr lang="en-US" sz="950" b="0" i="0" u="none" strike="noStrike" cap="none">
-                <a:solidFill>
-                  <a:srgbClr val="33322F"/>
-                </a:solidFill>
-                <a:latin typeface="Instrument Sans"/>
-                <a:ea typeface="Instrument Sans"/>
-                <a:cs typeface="Instrument Sans"/>
-                <a:sym typeface="Instrument Sans"/>
-              </a:rPr>
-              <a:t>Exploits get patched;</a:t>
-            </a:r>
-          </a:p>
-          <a:p>
-            <a:pPr marL="0" marR="0" lvl="0" indent="0" algn="l" rtl="0">
-              <a:lnSpc>
-                <a:spcPct val="110000"/>
-              </a:lnSpc>
-              <a:spcBef>
-                <a:spcPts val="0"/>
-              </a:spcBef>
-              <a:spcAft>
-                <a:spcPts val="0"/>
-              </a:spcAft>
-              <a:buNone/>
-            </a:pPr>
-            <a:r>
-              <a:rPr lang="en-US" sz="950" b="0" i="0" u="none" strike="noStrike" cap="none">
-                <a:solidFill>
-                  <a:srgbClr val="33322F"/>
-                </a:solidFill>
-                <a:latin typeface="Instrument Sans"/>
-                <a:ea typeface="Instrument Sans"/>
-                <a:cs typeface="Instrument Sans"/>
-                <a:sym typeface="Instrument Sans"/>
-              </a:rPr>
-              <a:t>failures become new tasks</a:t>
-            </a:r>
-          </a:p>
-        </p:txBody>
-      </p:sp>
-      <p:sp>
-        <p:nvSpPr>
-          <p:cNvPr id="5043" name="SimReal 5043"/>
-          <p:cNvSpPr txBox="1"/>
-          <p:nvPr/>
-        </p:nvSpPr>
-        <p:spPr>
-          <a:xfrm>
-            <a:off x="9367114" y="3639312"/>
-            <a:ext cx="274320" cy="1097280"/>
-          </a:xfrm>
-          <a:prstGeom prst="rect">
-            <a:avLst/>
-          </a:prstGeom>
-          <a:noFill/>
-          <a:ln>
-            <a:noFill/>
-          </a:ln>
-        </p:spPr>
-        <p:txBody>
-          <a:bodyPr spcFirstLastPara="1" wrap="square" lIns="0" tIns="0" rIns="0" bIns="0" anchor="ctr" anchorCtr="0">
-            <a:noAutofit/>
-          </a:bodyPr>
-          <a:lstStyle/>
-          <a:p>
-            <a:pPr marL="0" marR="0" lvl="0" indent="0" algn="ctr" rtl="0">
-              <a:spcBef>
-                <a:spcPts val="0"/>
-              </a:spcBef>
-              <a:spcAft>
-                <a:spcPts val="0"/>
-              </a:spcAft>
-              <a:buNone/>
-            </a:pPr>
-            <a:r>
-              <a:rPr lang="en-US" sz="1200" b="0" i="0" u="none" strike="noStrike" cap="none">
-                <a:solidFill>
-                  <a:srgbClr val="6E6C66"/>
-                </a:solidFill>
-                <a:latin typeface="Instrument Sans"/>
-                <a:ea typeface="Instrument Sans"/>
-                <a:cs typeface="Instrument Sans"/>
-                <a:sym typeface="Instrument Sans"/>
-              </a:rPr>
-              <a:t>→</a:t>
-            </a:r>
-          </a:p>
-        </p:txBody>
-      </p:sp>
-      <p:sp>
-        <p:nvSpPr>
-          <p:cNvPr id="5044" name="SimReal 5044"/>
-          <p:cNvSpPr/>
-          <p:nvPr/>
-        </p:nvSpPr>
-        <p:spPr>
-          <a:xfrm>
-            <a:off x="9641434" y="3639312"/>
-            <a:ext cx="1998878" cy="1097280"/>
-          </a:xfrm>
-          <a:prstGeom prst="rect">
-            <a:avLst/>
-          </a:prstGeom>
-          <a:solidFill>
-            <a:srgbClr val="F2F1EC"/>
-          </a:solidFill>
-          <a:ln>
-            <a:noFill/>
-          </a:ln>
-        </p:spPr>
-        <p:txBody>
-          <a:bodyPr/>
-          <a:lstStyle/>
-          <a:p>
-            <a:endParaRPr/>
-          </a:p>
-        </p:txBody>
-      </p:sp>
-      <p:sp>
-        <p:nvSpPr>
-          <p:cNvPr id="5045" name="SimReal 5045"/>
-          <p:cNvSpPr txBox="1"/>
-          <p:nvPr/>
-        </p:nvSpPr>
-        <p:spPr>
-          <a:xfrm>
-            <a:off x="9806026" y="3749040"/>
-            <a:ext cx="1724558" cy="182880"/>
-          </a:xfrm>
-          <a:prstGeom prst="rect">
-            <a:avLst/>
-          </a:prstGeom>
-          <a:noFill/>
-          <a:ln>
-            <a:noFill/>
-          </a:ln>
-        </p:spPr>
-        <p:txBody>
-          <a:bodyPr spcFirstLastPara="1" wrap="square" lIns="0" tIns="0" rIns="0" bIns="0" anchor="t" anchorCtr="0">
-            <a:noAutofit/>
-          </a:bodyPr>
-          <a:lstStyle/>
-          <a:p>
-            <a:pPr marL="0" marR="0" lvl="0" indent="0" algn="l" rtl="0">
-              <a:spcBef>
-                <a:spcPts val="0"/>
-              </a:spcBef>
-              <a:spcAft>
-                <a:spcPts val="0"/>
-              </a:spcAft>
-              <a:buNone/>
-            </a:pPr>
-            <a:r>
-              <a:rPr lang="en-US" sz="900" b="0" i="0" u="none" strike="noStrike" cap="none">
-                <a:solidFill>
-                  <a:srgbClr val="C2410C"/>
-                </a:solidFill>
-                <a:latin typeface="IBM Plex Mono"/>
-                <a:ea typeface="IBM Plex Mono"/>
-                <a:cs typeface="IBM Plex Mono"/>
-                <a:sym typeface="IBM Plex Mono"/>
-              </a:rPr>
-              <a:t>Planned</a:t>
-            </a:r>
-          </a:p>
-        </p:txBody>
-      </p:sp>
-      <p:sp>
-        <p:nvSpPr>
-          <p:cNvPr id="5046" name="SimReal 5046"/>
-          <p:cNvSpPr txBox="1"/>
-          <p:nvPr/>
-        </p:nvSpPr>
-        <p:spPr>
-          <a:xfrm>
-            <a:off x="9806026" y="3968496"/>
-            <a:ext cx="1724558" cy="310896"/>
-          </a:xfrm>
-          <a:prstGeom prst="rect">
-            <a:avLst/>
-          </a:prstGeom>
-          <a:noFill/>
-          <a:ln>
-            <a:noFill/>
-          </a:ln>
-        </p:spPr>
-        <p:txBody>
-          <a:bodyPr spcFirstLastPara="1" wrap="square" lIns="0" tIns="0" rIns="0" bIns="0" anchor="t" anchorCtr="0">
-            <a:noAutofit/>
-          </a:bodyPr>
-          <a:lstStyle/>
-          <a:p>
-            <a:pPr marL="0" marR="0" lvl="0" indent="0" algn="l" rtl="0">
-              <a:spcBef>
-                <a:spcPts val="0"/>
-              </a:spcBef>
-              <a:spcAft>
-                <a:spcPts val="0"/>
-              </a:spcAft>
-              <a:buNone/>
-            </a:pPr>
-            <a:r>
-              <a:rPr lang="en-US" sz="1500" b="0" i="0" u="none" strike="noStrike" cap="none">
-                <a:solidFill>
-                  <a:srgbClr val="111110"/>
-                </a:solidFill>
-                <a:latin typeface="Newsreader"/>
-                <a:ea typeface="Newsreader"/>
-                <a:cs typeface="Newsreader"/>
-                <a:sym typeface="Newsreader"/>
-              </a:rPr>
-              <a:t>Data to labs</a:t>
-            </a:r>
-          </a:p>
-        </p:txBody>
-      </p:sp>
-      <p:sp>
-        <p:nvSpPr>
-          <p:cNvPr id="5047" name="SimReal 5047"/>
-          <p:cNvSpPr txBox="1"/>
-          <p:nvPr/>
-        </p:nvSpPr>
-        <p:spPr>
-          <a:xfrm>
-            <a:off x="9806026" y="4315968"/>
-            <a:ext cx="1724558" cy="365760"/>
-          </a:xfrm>
-          <a:prstGeom prst="rect">
-            <a:avLst/>
-          </a:prstGeom>
-          <a:noFill/>
-          <a:ln>
-            <a:noFill/>
-          </a:ln>
-        </p:spPr>
-        <p:txBody>
-          <a:bodyPr spcFirstLastPara="1" wrap="square" lIns="0" tIns="0" rIns="0" bIns="0" anchor="t" anchorCtr="0">
-            <a:noAutofit/>
-          </a:bodyPr>
-          <a:lstStyle/>
-          <a:p>
-            <a:pPr marL="0" marR="0" lvl="0" indent="0" algn="l" rtl="0">
-              <a:lnSpc>
-                <a:spcPct val="110000"/>
-              </a:lnSpc>
-              <a:spcBef>
-                <a:spcPts val="0"/>
-              </a:spcBef>
-              <a:spcAft>
-                <a:spcPts val="0"/>
-              </a:spcAft>
-              <a:buNone/>
-            </a:pPr>
-            <a:r>
-              <a:rPr lang="en-US" sz="950" b="0" i="0" u="none" strike="noStrike" cap="none">
-                <a:solidFill>
-                  <a:srgbClr val="33322F"/>
-                </a:solidFill>
-                <a:latin typeface="Instrument Sans"/>
-                <a:ea typeface="Instrument Sans"/>
-                <a:cs typeface="Instrument Sans"/>
-                <a:sym typeface="Instrument Sans"/>
-              </a:rPr>
-              <a:t>Labs train stronger models,</a:t>
-            </a:r>
-          </a:p>
-          <a:p>
-            <a:pPr marL="0" marR="0" lvl="0" indent="0" algn="l" rtl="0">
-              <a:lnSpc>
-                <a:spcPct val="110000"/>
-              </a:lnSpc>
-              <a:spcBef>
-                <a:spcPts val="0"/>
-              </a:spcBef>
-              <a:spcAft>
-                <a:spcPts val="0"/>
-              </a:spcAft>
-              <a:buNone/>
-            </a:pPr>
-            <a:r>
-              <a:rPr lang="en-US" sz="950" b="0" i="0" u="none" strike="noStrike" cap="none">
-                <a:solidFill>
-                  <a:srgbClr val="33322F"/>
-                </a:solidFill>
-                <a:latin typeface="Instrument Sans"/>
-                <a:ea typeface="Instrument Sans"/>
-                <a:cs typeface="Instrument Sans"/>
-                <a:sym typeface="Instrument Sans"/>
-              </a:rPr>
-              <a:t>bringing more personal agents</a:t>
-            </a:r>
-          </a:p>
-        </p:txBody>
-      </p:sp>
-      <p:sp>
-        <p:nvSpPr>
-          <p:cNvPr id="5048" name="SimReal 5048"/>
-          <p:cNvSpPr/>
-          <p:nvPr/>
-        </p:nvSpPr>
-        <p:spPr>
-          <a:xfrm>
-            <a:off x="10640873" y="4736592"/>
-            <a:ext cx="10973" cy="182880"/>
-          </a:xfrm>
-          <a:prstGeom prst="rect">
-            <a:avLst/>
-          </a:prstGeom>
-          <a:solidFill>
-            <a:srgbClr val="C4C0B7"/>
-          </a:solidFill>
-          <a:ln>
-            <a:noFill/>
-          </a:ln>
-        </p:spPr>
-        <p:txBody>
-          <a:bodyPr/>
-          <a:lstStyle/>
-          <a:p>
-            <a:endParaRPr/>
-          </a:p>
-        </p:txBody>
-      </p:sp>
-      <p:sp>
-        <p:nvSpPr>
-          <p:cNvPr id="5049" name="SimReal 5049"/>
-          <p:cNvSpPr/>
-          <p:nvPr/>
-        </p:nvSpPr>
-        <p:spPr>
-          <a:xfrm>
-            <a:off x="1548079" y="4919472"/>
-            <a:ext cx="9103766" cy="10973"/>
-          </a:xfrm>
-          <a:prstGeom prst="rect">
-            <a:avLst/>
-          </a:prstGeom>
-          <a:solidFill>
-            <a:srgbClr val="C4C0B7"/>
-          </a:solidFill>
-          <a:ln>
-            <a:noFill/>
-          </a:ln>
-        </p:spPr>
-        <p:txBody>
-          <a:bodyPr/>
-          <a:lstStyle/>
-          <a:p>
-            <a:endParaRPr/>
-          </a:p>
-        </p:txBody>
-      </p:sp>
-      <p:sp>
-        <p:nvSpPr>
-          <p:cNvPr id="5050" name="SimReal 5050"/>
-          <p:cNvSpPr/>
-          <p:nvPr/>
-        </p:nvSpPr>
-        <p:spPr>
-          <a:xfrm>
-            <a:off x="1548079" y="4828032"/>
-            <a:ext cx="10973" cy="100584"/>
-          </a:xfrm>
-          <a:prstGeom prst="rect">
-            <a:avLst/>
-          </a:prstGeom>
-          <a:solidFill>
-            <a:srgbClr val="C4C0B7"/>
-          </a:solidFill>
-          <a:ln>
-            <a:noFill/>
-          </a:ln>
-        </p:spPr>
-        <p:txBody>
-          <a:bodyPr/>
-          <a:lstStyle/>
-          <a:p>
-            <a:endParaRPr/>
-          </a:p>
-        </p:txBody>
-      </p:sp>
-      <p:sp>
-        <p:nvSpPr>
-          <p:cNvPr id="5051" name="SimReal 5051"/>
-          <p:cNvSpPr txBox="1"/>
-          <p:nvPr/>
-        </p:nvSpPr>
-        <p:spPr>
-          <a:xfrm>
-            <a:off x="1365199" y="4718304"/>
-            <a:ext cx="376733" cy="146304"/>
-          </a:xfrm>
-          <a:prstGeom prst="rect">
-            <a:avLst/>
-          </a:prstGeom>
-          <a:noFill/>
-          <a:ln>
-            <a:noFill/>
-          </a:ln>
-        </p:spPr>
-        <p:txBody>
-          <a:bodyPr spcFirstLastPara="1" wrap="square" lIns="0" tIns="0" rIns="0" bIns="0" anchor="ctr" anchorCtr="0">
-            <a:noAutofit/>
-          </a:bodyPr>
-          <a:lstStyle/>
-          <a:p>
-            <a:pPr marL="0" marR="0" lvl="0" indent="0" algn="ctr" rtl="0">
-              <a:spcBef>
-                <a:spcPts val="0"/>
-              </a:spcBef>
-              <a:spcAft>
-                <a:spcPts val="0"/>
-              </a:spcAft>
-              <a:buNone/>
-            </a:pPr>
-            <a:r>
-              <a:rPr lang="en-US" sz="900" b="0" i="0" u="none" strike="noStrike" cap="none">
-                <a:solidFill>
-                  <a:srgbClr val="6E6C66"/>
-                </a:solidFill>
-                <a:latin typeface="Instrument Sans"/>
-                <a:ea typeface="Instrument Sans"/>
-                <a:cs typeface="Instrument Sans"/>
-                <a:sym typeface="Instrument Sans"/>
-              </a:rPr>
-              <a:t>↑</a:t>
-            </a:r>
-          </a:p>
-        </p:txBody>
-      </p:sp>
-      <p:sp>
-        <p:nvSpPr>
-          <p:cNvPr id="5052" name="SimReal 5052"/>
-          <p:cNvSpPr txBox="1"/>
-          <p:nvPr/>
-        </p:nvSpPr>
-        <p:spPr>
-          <a:xfrm>
-            <a:off x="548640" y="5065776"/>
-            <a:ext cx="11091672" cy="329184"/>
-          </a:xfrm>
-          <a:prstGeom prst="rect">
-            <a:avLst/>
-          </a:prstGeom>
-          <a:noFill/>
-          <a:ln>
-            <a:noFill/>
-          </a:ln>
-        </p:spPr>
-        <p:txBody>
-          <a:bodyPr spcFirstLastPara="1" wrap="square" lIns="0" tIns="0" rIns="0" bIns="0" anchor="ctr" anchorCtr="0">
-            <a:noAutofit/>
-          </a:bodyPr>
-          <a:lstStyle/>
-          <a:p>
-            <a:pPr marL="0" marR="0" lvl="0" indent="0" algn="l" rtl="0">
-              <a:spcBef>
-                <a:spcPts val="0"/>
-              </a:spcBef>
-              <a:spcAft>
-                <a:spcPts val="0"/>
-              </a:spcAft>
-              <a:buNone/>
-            </a:pPr>
-            <a:r>
-              <a:rPr lang="en-US" sz="1000" b="1" i="0" u="none" strike="noStrike" cap="none">
-                <a:solidFill>
-                  <a:srgbClr val="C2410C"/>
-                </a:solidFill>
-                <a:latin typeface="IBM Plex Mono"/>
-                <a:ea typeface="IBM Plex Mono"/>
-                <a:cs typeface="IBM Plex Mono"/>
-                <a:sym typeface="IBM Plex Mono"/>
-              </a:rPr>
-              <a:t>Data rules   </a:t>
-            </a:r>
-            <a:r>
-              <a:rPr lang="en-US" sz="1050" b="0" i="0" u="none" strike="noStrike" cap="none">
-                <a:solidFill>
-                  <a:srgbClr val="111110"/>
-                </a:solidFill>
-                <a:latin typeface="Instrument Sans"/>
-                <a:ea typeface="Instrument Sans"/>
-                <a:cs typeface="Instrument Sans"/>
-                <a:sym typeface="Instrument Sans"/>
-              </a:rPr>
-              <a:t>Partners decide: pay to practice in private, or share de-identified runs for credits and a revenue share. Data reaches labs only with a license record.</a:t>
-            </a:r>
-          </a:p>
-        </p:txBody>
-      </p:sp>
-      <p:sp>
-        <p:nvSpPr>
-          <p:cNvPr id="5053" name="SimReal 5053"/>
-          <p:cNvSpPr txBox="1"/>
-          <p:nvPr/>
-        </p:nvSpPr>
-        <p:spPr>
-          <a:xfrm>
-            <a:off x="548640" y="5468112"/>
-            <a:ext cx="11091672" cy="420624"/>
-          </a:xfrm>
-          <a:prstGeom prst="rect">
-            <a:avLst/>
-          </a:prstGeom>
-          <a:noFill/>
-          <a:ln>
-            <a:noFill/>
-          </a:ln>
-        </p:spPr>
-        <p:txBody>
-          <a:bodyPr spcFirstLastPara="1" wrap="square" lIns="0" tIns="0" rIns="0" bIns="0" anchor="ctr" anchorCtr="0">
-            <a:noAutofit/>
-          </a:bodyPr>
-          <a:lstStyle/>
-          <a:p>
-            <a:pPr marL="0" marR="0" lvl="0" indent="0" algn="l" rtl="0">
-              <a:spcBef>
-                <a:spcPts val="0"/>
-              </a:spcBef>
-              <a:spcAft>
-                <a:spcPts val="0"/>
-              </a:spcAft>
-              <a:buNone/>
-            </a:pPr>
-            <a:r>
-              <a:rPr lang="en-US" sz="2000" b="0" i="0" u="none" strike="noStrike" cap="none">
-                <a:solidFill>
-                  <a:srgbClr val="111110"/>
-                </a:solidFill>
-                <a:latin typeface="Newsreader"/>
-                <a:ea typeface="Newsreader"/>
-                <a:cs typeface="Newsreader"/>
-                <a:sym typeface="Newsreader"/>
-              </a:rPr>
-              <a:t>Sandboxes keep agents out of trouble. </a:t>
-            </a:r>
-            <a:r>
-              <a:rPr lang="en-US" sz="2000" b="0" i="0" u="none" strike="noStrike" cap="none">
-                <a:solidFill>
-                  <a:srgbClr val="C2410C"/>
-                </a:solidFill>
-                <a:latin typeface="Newsreader"/>
-                <a:ea typeface="Newsreader"/>
-                <a:cs typeface="Newsreader"/>
-                <a:sym typeface="Newsreader"/>
-              </a:rPr>
-              <a:t>We teach them to get it right</a:t>
-            </a:r>
-            <a:r>
-              <a:rPr lang="en-US" sz="2000" b="0" i="0" u="none" strike="noStrike" cap="none">
-                <a:solidFill>
-                  <a:srgbClr val="111110"/>
-                </a:solidFill>
-                <a:latin typeface="Newsreader"/>
-                <a:ea typeface="Newsreader"/>
-                <a:cs typeface="Newsreader"/>
-                <a:sym typeface="Newsreader"/>
-              </a:rPr>
               <a:t>.</a:t>
             </a:r>
           </a:p>
@@ -32904,7 +31344,7 @@
       </p:sp>
       <p:sp>
         <p:nvSpPr>
-          <p:cNvPr id="5054" name="SimReal 5054"/>
+          <p:cNvPr id="5022" name="SimReal 5022"/>
           <p:cNvSpPr txBox="1"/>
           <p:nvPr/>
         </p:nvSpPr>
@@ -32946,14 +31386,14 @@
                 <a:cs typeface="Instrument Sans"/>
                 <a:sym typeface="Instrument Sans"/>
               </a:rPr>
-              <a:t>Sources: Meta and OpenAI launches (Sep 8 and 29, 2026); Bloomberg (Sep 21, 2026); Instinct (Sep 28, 2026); Remote Labor Index (Scale AI and CAIS, Jul 2026). See A2.</a:t>
-            </a:r>
-          </a:p>
-        </p:txBody>
-      </p:sp>
-      <p:sp>
-        <p:nvSpPr>
-          <p:cNvPr id="5055" name="SimReal 5055"/>
+              <a:t>Sources: Meta and OpenAI launches (Sep 8 and 29, 2026); Instinct (Sep 28, 2026); Remote Labor Index (Scale AI and CAIS, Jul 2026). See A2.</a:t>
+            </a:r>
+          </a:p>
+        </p:txBody>
+      </p:sp>
+      <p:sp>
+        <p:nvSpPr>
+          <p:cNvPr id="5023" name="SimReal 5023"/>
           <p:cNvSpPr txBox="1"/>
           <p:nvPr/>
         </p:nvSpPr>
@@ -33002,7 +31442,7 @@
       </p:sp>
       <p:sp>
         <p:nvSpPr>
-          <p:cNvPr id="5056" name="SimReal 5056"/>
+          <p:cNvPr id="5024" name="SimReal 5024"/>
           <p:cNvSpPr txBox="1"/>
           <p:nvPr/>
         </p:nvSpPr>

--- a/SimReal-BP-v29-EN.pptx
+++ b/SimReal-BP-v29-EN.pptx
@@ -5943,7 +5943,7 @@
         </p:nvSpPr>
         <p:spPr>
           <a:xfrm>
-            <a:off x="548640" y="1554480"/>
+            <a:off x="548640" y="1234440"/>
             <a:ext cx="7498080" cy="1737360"/>
           </a:xfrm>
           <a:prstGeom prst="rect">
@@ -6021,7 +6021,56 @@
         </p:nvSpPr>
         <p:spPr>
           <a:xfrm>
-            <a:off x="548640" y="3520440"/>
+            <a:off x="548640" y="3127248"/>
+            <a:ext cx="8046720" cy="420624"/>
+          </a:xfrm>
+          <a:prstGeom prst="rect">
+            <a:avLst/>
+          </a:prstGeom>
+          <a:noFill/>
+          <a:ln>
+            <a:noFill/>
+          </a:ln>
+        </p:spPr>
+        <p:txBody>
+          <a:bodyPr spcFirstLastPara="1" wrap="square" lIns="0" tIns="0" rIns="0" bIns="0" anchor="t" anchorCtr="0">
+            <a:noAutofit/>
+          </a:bodyPr>
+          <a:lstStyle/>
+          <a:p>
+            <a:pPr marL="0" marR="0" lvl="0" indent="0" algn="l" rtl="0">
+              <a:spcBef>
+                <a:spcPts val="0"/>
+              </a:spcBef>
+              <a:spcAft>
+                <a:spcPts val="0"/>
+              </a:spcAft>
+              <a:buNone/>
+            </a:pPr>
+            <a:r>
+              <a:rPr lang="en-US" sz="2100" b="0" i="0" u="none" strike="noStrike" cap="none">
+                <a:solidFill>
+                  <a:srgbClr val="111110"/>
+                </a:solidFill>
+                <a:latin typeface="Newsreader"/>
+                <a:ea typeface="Newsreader"/>
+                <a:cs typeface="Newsreader"/>
+                <a:sym typeface="Newsreader"/>
+              </a:rPr>
+              <a:t>Before a personal agent is trusted, it practices here</a:t>
+            </a:r>
+          </a:p>
+        </p:txBody>
+      </p:sp>
+      <p:sp>
+        <p:nvSpPr>
+          <p:cNvPr id="5003" name="SimReal 5003"/>
+          <p:cNvSpPr txBox="1"/>
+          <p:nvPr/>
+        </p:nvSpPr>
+        <p:spPr>
+          <a:xfrm>
+            <a:off x="548640" y="3749040"/>
             <a:ext cx="8595360" cy="329184"/>
           </a:xfrm>
           <a:prstGeom prst="rect">
@@ -6057,14 +6106,14 @@
                 <a:cs typeface="Instrument Sans"/>
                 <a:sym typeface="Instrument Sans"/>
               </a:rPr>
-              <a:t>Real worlds rebuilt from real data, where AI labs, enterprises and personal agents train</a:t>
-            </a:r>
-          </a:p>
-        </p:txBody>
-      </p:sp>
-      <p:sp>
-        <p:nvSpPr>
-          <p:cNvPr id="5003" name="SimReal 5003"/>
+              <a:t>Real situations rebuilt from real data, for AI labs, enterprises and personal agents</a:t>
+            </a:r>
+          </a:p>
+        </p:txBody>
+      </p:sp>
+      <p:sp>
+        <p:nvSpPr>
+          <p:cNvPr id="5004" name="SimReal 5004"/>
           <p:cNvSpPr/>
           <p:nvPr/>
         </p:nvSpPr>
@@ -6093,7 +6142,7 @@
       </p:sp>
       <p:sp>
         <p:nvSpPr>
-          <p:cNvPr id="5004" name="SimReal 5004"/>
+          <p:cNvPr id="5005" name="SimReal 5005"/>
           <p:cNvSpPr txBox="1"/>
           <p:nvPr/>
         </p:nvSpPr>
@@ -6142,7 +6191,7 @@
       </p:sp>
       <p:sp>
         <p:nvSpPr>
-          <p:cNvPr id="5005" name="SimReal 5005"/>
+          <p:cNvPr id="5006" name="SimReal 5006"/>
           <p:cNvSpPr txBox="1"/>
           <p:nvPr/>
         </p:nvSpPr>
@@ -6191,7 +6240,7 @@
       </p:sp>
       <p:sp>
         <p:nvSpPr>
-          <p:cNvPr id="5006" name="SimReal 5006"/>
+          <p:cNvPr id="5007" name="SimReal 5007"/>
           <p:cNvSpPr txBox="1"/>
           <p:nvPr/>
         </p:nvSpPr>
@@ -6240,7 +6289,7 @@
       </p:sp>
       <p:sp>
         <p:nvSpPr>
-          <p:cNvPr id="5007" name="SimReal 5007"/>
+          <p:cNvPr id="5008" name="SimReal 5008"/>
           <p:cNvSpPr txBox="1"/>
           <p:nvPr/>
         </p:nvSpPr>
@@ -6289,7 +6338,7 @@
       </p:sp>
       <p:sp>
         <p:nvSpPr>
-          <p:cNvPr id="5008" name="SimReal 5008"/>
+          <p:cNvPr id="5009" name="SimReal 5009"/>
           <p:cNvSpPr txBox="1"/>
           <p:nvPr/>
         </p:nvSpPr>
@@ -8140,7 +8189,7 @@
                 <a:cs typeface="Newsreader"/>
                 <a:sym typeface="Newsreader"/>
               </a:rPr>
-              <a:t>Labs spend $8.5B a year on training data and RL environments: </a:t>
+              <a:t>Training data and RL environments are already a ~$8.5B-a-year business: </a:t>
             </a:r>
             <a:r>
               <a:rPr lang="en-US" sz="1800" b="0" i="0" u="none" strike="noStrike" cap="none">
@@ -14727,7 +14776,7 @@
                 <a:cs typeface="IBM Plex Mono"/>
                 <a:sym typeface="IBM Plex Mono"/>
               </a:rPr>
-              <a:t>Today · what labs buy</a:t>
+              <a:t>Today · vendor revenue</a:t>
             </a:r>
           </a:p>
         </p:txBody>
@@ -14825,7 +14874,7 @@
                 <a:cs typeface="Instrument Sans"/>
                 <a:sym typeface="Instrument Sans"/>
               </a:rPr>
-              <a:t>Training data and RL environments, 50+ vendors</a:t>
+              <a:t>50+ training-data and RL-environment vendors</a:t>
             </a:r>
           </a:p>
         </p:txBody>
@@ -14874,7 +14923,7 @@
                 <a:cs typeface="Instrument Sans"/>
                 <a:sym typeface="Instrument Sans"/>
               </a:rPr>
-              <a:t>Top three by revenue (Surge: 2024; others run-rate)</a:t>
+              <a:t>Leading vendors (Surge: 2024; others gross run-rate)</a:t>
             </a:r>
           </a:p>
         </p:txBody>
@@ -15177,7 +15226,7 @@
                 <a:cs typeface="Newsreader"/>
                 <a:sym typeface="Newsreader"/>
               </a:rPr>
-              <a:t>Snorkel AI</a:t>
+              <a:t>Handshake</a:t>
             </a:r>
           </a:p>
         </p:txBody>
@@ -15191,7 +15240,7 @@
         <p:spPr>
           <a:xfrm>
             <a:off x="1600200" y="4014216"/>
-            <a:ext cx="257175" cy="219456"/>
+            <a:ext cx="685800" cy="219456"/>
           </a:xfrm>
           <a:prstGeom prst="rect">
             <a:avLst/>
@@ -15219,7 +15268,7 @@
         </p:nvSpPr>
         <p:spPr>
           <a:xfrm>
-            <a:off x="1930527" y="3986784"/>
+            <a:off x="2359152" y="3986784"/>
             <a:ext cx="1005840" cy="274320"/>
           </a:xfrm>
           <a:prstGeom prst="rect">
@@ -15255,7 +15304,7 @@
                 <a:cs typeface="Instrument Sans"/>
                 <a:sym typeface="Instrument Sans"/>
               </a:rPr>
-              <a:t>$375M</a:t>
+              <a:t>~$1.0B</a:t>
             </a:r>
           </a:p>
         </p:txBody>
@@ -16566,7 +16615,7 @@
                 <a:cs typeface="Instrument Sans"/>
                 <a:sym typeface="Instrument Sans"/>
               </a:rPr>
-              <a:t>Sources: Menlo Ventures (Jul 2026); Mercor gross run-rate (Jun 2026), Surge revenue (2024), Snorkel run-rate (Sep 2026); McKinsey (Nov 2025); IMF (Apr 2026); company filings.</a:t>
+              <a:t>Sources: Deedy Das, Menlo Ventures (Jul 2026); Mercor gross run-rate (Jun 2026), Handshake AI training (Apr 2026), Surge revenue (2024); McKinsey (Nov 2025); IMF (Apr 2026); company filings.</a:t>
             </a:r>
           </a:p>
           <a:p>
@@ -17205,7 +17254,7 @@
                 <a:cs typeface="IBM Plex Mono"/>
                 <a:sym typeface="IBM Plex Mono"/>
               </a:rPr>
-              <a:t>Mercor, Surge, AfterQuery</a:t>
+              <a:t>Mercor, Surge, Handshake, AfterQuery</a:t>
             </a:r>
           </a:p>
         </p:txBody>
@@ -17258,6 +17307,32 @@
                 <a:sym typeface="Instrument Sans"/>
               </a:rPr>
               <a:t>Expert demos and judgments, human-graded</a:t>
+            </a:r>
+          </a:p>
+          <a:p>
+            <a:pPr marL="0" marR="0" lvl="0" indent="0" algn="l" rtl="0">
+              <a:lnSpc>
+                <a:spcPct val="110000"/>
+              </a:lnSpc>
+              <a:spcBef>
+                <a:spcPts val="384"/>
+              </a:spcBef>
+              <a:spcAft>
+                <a:spcPts val="0"/>
+              </a:spcAft>
+              <a:buNone/>
+            </a:pPr>
+            <a:r>
+              <a:rPr lang="en-US" sz="1100" b="0" i="0" u="none" strike="noStrike" cap="none">
+                <a:solidFill>
+                  <a:srgbClr val="33322F"/>
+                </a:solidFill>
+                <a:latin typeface="Instrument Sans"/>
+                <a:ea typeface="Instrument Sans"/>
+                <a:cs typeface="Instrument Sans"/>
+                <a:sym typeface="Instrument Sans"/>
+              </a:rPr>
+              <a:t>Mercor bought RL-environment maker Deeptune</a:t>
             </a:r>
           </a:p>
         </p:txBody>
@@ -17436,7 +17511,33 @@
                 <a:cs typeface="Instrument Sans"/>
                 <a:sym typeface="Instrument Sans"/>
               </a:rPr>
-              <a:t>Mainly serve Chinese labs: expert data and evals</a:t>
+              <a:t>Expert data, eval environments and benchmarks;</a:t>
+            </a:r>
+          </a:p>
+          <a:p>
+            <a:pPr marL="0" marR="0" lvl="0" indent="0" algn="l" rtl="0">
+              <a:lnSpc>
+                <a:spcPct val="110000"/>
+              </a:lnSpc>
+              <a:spcBef>
+                <a:spcPts val="384"/>
+              </a:spcBef>
+              <a:spcAft>
+                <a:spcPts val="0"/>
+              </a:spcAft>
+              <a:buNone/>
+            </a:pPr>
+            <a:r>
+              <a:rPr lang="en-US" sz="1100" b="0" i="0" u="none" strike="noStrike" cap="none">
+                <a:solidFill>
+                  <a:srgbClr val="33322F"/>
+                </a:solidFill>
+                <a:latin typeface="Instrument Sans"/>
+                <a:ea typeface="Instrument Sans"/>
+                <a:cs typeface="Instrument Sans"/>
+                <a:sym typeface="Instrument Sans"/>
+              </a:rPr>
+              <a:t>mainly for Chinese labs</a:t>
             </a:r>
           </a:p>
         </p:txBody>
@@ -18534,7 +18635,7 @@
                 <a:cs typeface="Instrument Sans"/>
                 <a:sym typeface="Instrument Sans"/>
               </a:rPr>
-              <a:t>Per Bloomberg, Alibaba led a $300M round in UniPat at a $2.5B valuation; Humanlaya closed a CDH-led Pre-A of several hundred million RMB;</a:t>
+              <a:t>Per Bloomberg, Alibaba is set to lead a $300M round in UniPat at a $2.5B valuation; Humanlaya closed a CDH-led Pre-A of several hundred million RMB;</a:t>
             </a:r>
             <a:br>
               <a:rPr lang="en-US" sz="1000"/>
@@ -18549,7 +18650,7 @@
                 <a:cs typeface="Instrument Sans"/>
                 <a:sym typeface="Instrument Sans"/>
               </a:rPr>
-              <a:t>Alibaba, ByteDance and DeepSeek already buy from both.</a:t>
+              <a:t>Alibaba, ByteDance, DeepSeek and others have bought data or services from both.</a:t>
             </a:r>
           </a:p>
         </p:txBody>
@@ -19049,7 +19150,7 @@
         <p:spPr>
           <a:xfrm>
             <a:off x="548640" y="1499616"/>
-            <a:ext cx="8229600" cy="201168"/>
+            <a:ext cx="10058400" cy="201168"/>
           </a:xfrm>
           <a:prstGeom prst="rect">
             <a:avLst/>
@@ -19084,7 +19185,7 @@
                 <a:cs typeface="IBM Plex Mono"/>
                 <a:sym typeface="IBM Plex Mono"/>
               </a:rPr>
-              <a:t>Every wave was won by the fastest young team</a:t>
+              <a:t>Every wave was won by the fastest young team; in personal agents, Instinct’s founder is 23</a:t>
             </a:r>
           </a:p>
         </p:txBody>
@@ -20618,7 +20719,33 @@
                 <a:cs typeface="Instrument Sans"/>
                 <a:sym typeface="Instrument Sans"/>
               </a:rPr>
-              <a:t>Valuation, 18 months after YC</a:t>
+              <a:t>Reported valuation,</a:t>
+            </a:r>
+          </a:p>
+          <a:p>
+            <a:pPr marL="0" marR="0" lvl="0" indent="0" algn="l" rtl="0">
+              <a:lnSpc>
+                <a:spcPct val="100000"/>
+              </a:lnSpc>
+              <a:spcBef>
+                <a:spcPts val="0"/>
+              </a:spcBef>
+              <a:spcAft>
+                <a:spcPts val="0"/>
+              </a:spcAft>
+              <a:buNone/>
+            </a:pPr>
+            <a:r>
+              <a:rPr lang="en-US" sz="1000" b="0" i="0" u="none" strike="noStrike" cap="none">
+                <a:solidFill>
+                  <a:srgbClr val="33322F"/>
+                </a:solidFill>
+                <a:latin typeface="Instrument Sans"/>
+                <a:ea typeface="Instrument Sans"/>
+                <a:cs typeface="Instrument Sans"/>
+                <a:sym typeface="Instrument Sans"/>
+              </a:rPr>
+              <a:t>18 months after YC</a:t>
             </a:r>
           </a:p>
         </p:txBody>
@@ -20699,7 +20826,33 @@
                 <a:cs typeface="Instrument Sans"/>
                 <a:sym typeface="Instrument Sans"/>
               </a:rPr>
-              <a:t>Founded by two students around 21</a:t>
+              <a:t>Founded by two high-school</a:t>
+            </a:r>
+          </a:p>
+          <a:p>
+            <a:pPr marL="0" marR="0" lvl="0" indent="0" algn="l" rtl="0">
+              <a:lnSpc>
+                <a:spcPct val="100000"/>
+              </a:lnSpc>
+              <a:spcBef>
+                <a:spcPts val="0"/>
+              </a:spcBef>
+              <a:spcAft>
+                <a:spcPts val="0"/>
+              </a:spcAft>
+              <a:buNone/>
+            </a:pPr>
+            <a:r>
+              <a:rPr lang="en-US" sz="1000" b="0" i="0" u="none" strike="noStrike" cap="none">
+                <a:solidFill>
+                  <a:srgbClr val="33322F"/>
+                </a:solidFill>
+                <a:latin typeface="Instrument Sans"/>
+                <a:ea typeface="Instrument Sans"/>
+                <a:cs typeface="Instrument Sans"/>
+                <a:sym typeface="Instrument Sans"/>
+              </a:rPr>
+              <a:t>friends, now 22 and 23</a:t>
             </a:r>
           </a:p>
         </p:txBody>
@@ -22789,7 +22942,7 @@
                 <a:cs typeface="Instrument Sans"/>
                 <a:sym typeface="Instrument Sans"/>
               </a:rPr>
-              <a:t>Alibaba led; Tencent, HongShan joined</a:t>
+              <a:t>Alibaba to lead; Tencent, HSG in</a:t>
             </a:r>
           </a:p>
         </p:txBody>
@@ -22867,7 +23020,7 @@
                 <a:cs typeface="IBM Plex Mono"/>
                 <a:sym typeface="IBM Plex Mono"/>
               </a:rPr>
-              <a:t>China · Humanlaya</a:t>
+              <a:t>China · Apex Intelligence</a:t>
             </a:r>
           </a:p>
         </p:txBody>
@@ -22916,7 +23069,7 @@
                 <a:cs typeface="Newsreader"/>
                 <a:sym typeface="Newsreader"/>
               </a:rPr>
-              <a:t>Hundreds of millions</a:t>
+              <a:t>~RMB 400M</a:t>
             </a:r>
           </a:p>
         </p:txBody>
@@ -22965,7 +23118,7 @@
                 <a:cs typeface="Instrument Sans"/>
                 <a:sym typeface="Instrument Sans"/>
               </a:rPr>
-              <a:t>Pre-A round size in RMB (Sep 2026)</a:t>
+              <a:t>RSI angel rounds (Sep 2026)</a:t>
             </a:r>
           </a:p>
         </p:txBody>
@@ -23017,7 +23170,7 @@
                 <a:cs typeface="Instrument Sans"/>
                 <a:sym typeface="Instrument Sans"/>
               </a:rPr>
-              <a:t>CDH led; HongShan and others joined</a:t>
+              <a:t>Led by IDG Capital and others</a:t>
             </a:r>
           </a:p>
         </p:txBody>
@@ -23144,7 +23297,7 @@
                 <a:cs typeface="Newsreader"/>
                 <a:sym typeface="Newsreader"/>
               </a:rPr>
-              <a:t>$100M → ~$3B</a:t>
+              <a:t>$100M → $3.25B</a:t>
             </a:r>
           </a:p>
         </p:txBody>
@@ -23193,7 +23346,7 @@
                 <a:cs typeface="Instrument Sans"/>
                 <a:sym typeface="Instrument Sans"/>
               </a:rPr>
-              <a:t>Seed post → 14 months later (in talks)</a:t>
+              <a:t>Seed → 15 months later (raising)</a:t>
             </a:r>
           </a:p>
         </p:txBody>
@@ -23421,7 +23574,7 @@
                 <a:cs typeface="Instrument Sans"/>
                 <a:sym typeface="Instrument Sans"/>
               </a:rPr>
-              <a:t>Series A → 5 months later</a:t>
+              <a:t>Series A → 5 months later (reported)</a:t>
             </a:r>
           </a:p>
         </p:txBody>
@@ -23522,7 +23675,7 @@
                 <a:cs typeface="Newsreader"/>
                 <a:sym typeface="Newsreader"/>
               </a:rPr>
-              <a:t>HongShan, CDH, Capital Today, BAI, Alibaba and Tencent are already in: </a:t>
+              <a:t>HSG, CDH, Capital Today, BAI and IDG are in; Alibaba and Tencent are moving in: </a:t>
             </a:r>
             <a:r>
               <a:rPr lang="en-US" sz="1600" b="0" i="0" u="none" strike="noStrike" cap="none">
@@ -23595,7 +23748,7 @@
                 <a:cs typeface="Instrument Sans"/>
                 <a:sym typeface="Instrument Sans"/>
               </a:rPr>
-              <a:t>UniPat: reported valuation; Applied Compute ~$3B: valuation in talks; Humanlaya: round size; others post-money. Sources in A2.</a:t>
+              <a:t>UniPat and AfterQuery $3.2B: reported valuations; Applied Compute $3.25B: round in progress; Apex: round size; others post-money. Sources in A2.</a:t>
             </a:r>
           </a:p>
         </p:txBody>
@@ -28613,7 +28766,7 @@
                 <a:cs typeface="Instrument Sans"/>
                 <a:sym typeface="Instrument Sans"/>
               </a:rPr>
-              <a:t>Labs buy $8.5B a year of data and RL environments</a:t>
+              <a:t>Data and RL-environment vendors earn ~$8.5B a year</a:t>
             </a:r>
           </a:p>
           <a:p>
@@ -29808,7 +29961,7 @@
                 <a:cs typeface="Instrument Sans"/>
                 <a:sym typeface="Instrument Sans"/>
               </a:rPr>
-              <a:t>Xitadel public preview: human baseline 80; best frontier model 77.28 (GPT 6); no model has passed the human baseline yet</a:t>
+              <a:t>Xitadel public preview: human baseline 80; best frontier model 77.28 (GPT-6); no model has passed the human baseline yet</a:t>
             </a:r>
           </a:p>
         </p:txBody>
@@ -30464,7 +30617,7 @@
         <p:spPr>
           <a:xfrm>
             <a:off x="548640" y="1499616"/>
-            <a:ext cx="7315200" cy="201168"/>
+            <a:ext cx="10058400" cy="201168"/>
           </a:xfrm>
           <a:prstGeom prst="rect">
             <a:avLst/>
@@ -30499,7 +30652,7 @@
                 <a:cs typeface="IBM Plex Mono"/>
                 <a:sym typeface="IBM Plex Mono"/>
               </a:rPr>
-              <a:t>Personal agents are here</a:t>
+              <a:t>September 2026: personal agents arrive; in China, Qwen and Manus follow the same month</a:t>
             </a:r>
           </a:p>
         </p:txBody>
@@ -30629,7 +30782,33 @@
                 <a:cs typeface="Instrument Sans"/>
                 <a:sym typeface="Instrument Sans"/>
               </a:rPr>
-              <a:t>Meta, launched Sep 8</a:t>
+              <a:t>Meta, launched Sep 8;</a:t>
+            </a:r>
+          </a:p>
+          <a:p>
+            <a:pPr marL="0" marR="0" lvl="0" indent="0" algn="l" rtl="0">
+              <a:lnSpc>
+                <a:spcPct val="110000"/>
+              </a:lnSpc>
+              <a:spcBef>
+                <a:spcPts val="0"/>
+              </a:spcBef>
+              <a:spcAft>
+                <a:spcPts val="0"/>
+              </a:spcAft>
+              <a:buNone/>
+            </a:pPr>
+            <a:r>
+              <a:rPr lang="en-US" sz="1150" b="0" i="0" u="none" strike="noStrike" cap="none">
+                <a:solidFill>
+                  <a:srgbClr val="33322F"/>
+                </a:solidFill>
+                <a:latin typeface="Instrument Sans"/>
+                <a:ea typeface="Instrument Sans"/>
+                <a:cs typeface="Instrument Sans"/>
+                <a:sym typeface="Instrument Sans"/>
+              </a:rPr>
+              <a:t>No. 1 on the US App Store in 10 days</a:t>
             </a:r>
           </a:p>
         </p:txBody>
@@ -30759,7 +30938,33 @@
                 <a:cs typeface="Instrument Sans"/>
                 <a:sym typeface="Instrument Sans"/>
               </a:rPr>
-              <a:t>OpenAI, unveiled Sep 29</a:t>
+              <a:t>OpenAI, unveiled Sep 29;</a:t>
+            </a:r>
+          </a:p>
+          <a:p>
+            <a:pPr marL="0" marR="0" lvl="0" indent="0" algn="l" rtl="0">
+              <a:lnSpc>
+                <a:spcPct val="110000"/>
+              </a:lnSpc>
+              <a:spcBef>
+                <a:spcPts val="0"/>
+              </a:spcBef>
+              <a:spcAft>
+                <a:spcPts val="0"/>
+              </a:spcAft>
+              <a:buNone/>
+            </a:pPr>
+            <a:r>
+              <a:rPr lang="en-US" sz="1150" b="0" i="0" u="none" strike="noStrike" cap="none">
+                <a:solidFill>
+                  <a:srgbClr val="33322F"/>
+                </a:solidFill>
+                <a:latin typeface="Instrument Sans"/>
+                <a:ea typeface="Instrument Sans"/>
+                <a:cs typeface="Instrument Sans"/>
+                <a:sym typeface="Instrument Sans"/>
+              </a:rPr>
+              <a:t>always-on in the cloud</a:t>
             </a:r>
           </a:p>
         </p:txBody>
@@ -30889,7 +31094,33 @@
                 <a:cs typeface="Instrument Sans"/>
                 <a:sym typeface="Instrument Sans"/>
               </a:rPr>
-              <a:t>Instinct, up 4x in 33 days</a:t>
+              <a:t>Instinct’s valuation, up 4x in 33 days;</a:t>
+            </a:r>
+          </a:p>
+          <a:p>
+            <a:pPr marL="0" marR="0" lvl="0" indent="0" algn="l" rtl="0">
+              <a:lnSpc>
+                <a:spcPct val="110000"/>
+              </a:lnSpc>
+              <a:spcBef>
+                <a:spcPts val="0"/>
+              </a:spcBef>
+              <a:spcAft>
+                <a:spcPts val="0"/>
+              </a:spcAft>
+              <a:buNone/>
+            </a:pPr>
+            <a:r>
+              <a:rPr lang="en-US" sz="1150" b="0" i="0" u="none" strike="noStrike" cap="none">
+                <a:solidFill>
+                  <a:srgbClr val="33322F"/>
+                </a:solidFill>
+                <a:latin typeface="Instrument Sans"/>
+                <a:ea typeface="Instrument Sans"/>
+                <a:cs typeface="Instrument Sans"/>
+                <a:sym typeface="Instrument Sans"/>
+              </a:rPr>
+              <a:t>Sequoia, Benchmark, Coatue</a:t>
             </a:r>
           </a:p>
         </p:txBody>
@@ -31386,7 +31617,7 @@
                 <a:cs typeface="Instrument Sans"/>
                 <a:sym typeface="Instrument Sans"/>
               </a:rPr>
-              <a:t>Sources: Meta and OpenAI launches (Sep 8 and 29, 2026); Instinct (Sep 28, 2026); Remote Labor Index (Scale AI and CAIS, Jul 2026). See A2.</a:t>
+              <a:t>Sources: Meta, OpenAI, Qwen and Manus launches (Sep 2026); TechCrunch (Sep 25, 2026); Instinct (Reuters, Sep 28, 2026); Remote Labor Index (Scale AI and CAIS, Jul 2026). See A2.</a:t>
             </a:r>
           </a:p>
         </p:txBody>
@@ -31764,7 +31995,7 @@
           <a:p>
             <a:pPr marL="0" marR="0" lvl="0" indent="0" algn="l" rtl="0">
               <a:lnSpc>
-                <a:spcPct val="110000"/>
+                <a:spcPct val="108000"/>
               </a:lnSpc>
               <a:spcBef>
                 <a:spcPts val="0"/>
@@ -31796,16 +32027,16 @@
                 <a:cs typeface="Instrument Sans"/>
                 <a:sym typeface="Instrument Sans"/>
               </a:rPr>
-              <a:t>TechCrunch (Feb 2025, $75M); CEO (Sep 2025, $500M); Sacra (Dec 2025, $760M); Mercor (early 2026, $1B); Dealroom (Jun 2026, $2B). All gross; experts take 60–70% (Bloomberg)</a:t>
+              <a:t>TechCrunch (Feb 2025, $75M); Sacra (Dec 2025, $760M); Dealroom and Forbes (Jun 2026, $2B). All gross; experts take 60–70% (Bloomberg)</a:t>
             </a:r>
           </a:p>
           <a:p>
             <a:pPr marL="0" marR="0" lvl="0" indent="0" algn="l" rtl="0">
               <a:lnSpc>
-                <a:spcPct val="110000"/>
+                <a:spcPct val="108000"/>
               </a:lnSpc>
               <a:spcBef>
-                <a:spcPts val="500"/>
+                <a:spcPts val="300"/>
               </a:spcBef>
               <a:spcAft>
                 <a:spcPts val="0"/>
@@ -31822,7 +32053,7 @@
                 <a:cs typeface="Instrument Sans"/>
                 <a:sym typeface="Instrument Sans"/>
               </a:rPr>
-              <a:t>Mercor valuation: </a:t>
+              <a:t>Mercor valuation and M&amp;A: </a:t>
             </a:r>
             <a:r>
               <a:rPr lang="en-US" sz="850" b="0" i="0" u="none" strike="noStrike" cap="none">
@@ -31834,16 +32065,16 @@
                 <a:cs typeface="Instrument Sans"/>
                 <a:sym typeface="Instrument Sans"/>
               </a:rPr>
-              <a:t>Series A $250M (Sep 2024), Series B $2B (Feb 2025), Series C $10B (Oct 2025); a $20B round in early talks (Bloomberg, Jul 9, 2026)</a:t>
+              <a:t>Series C $10B (Oct 2025); a $20B round still in talks (Bloomberg, Jul 9, 2026; The Information, Aug 2026); bought RL-environment startup Deeptune on Jul 9, 2026 (Forbes)</a:t>
             </a:r>
           </a:p>
           <a:p>
             <a:pPr marL="0" marR="0" lvl="0" indent="0" algn="l" rtl="0">
               <a:lnSpc>
-                <a:spcPct val="110000"/>
+                <a:spcPct val="108000"/>
               </a:lnSpc>
               <a:spcBef>
-                <a:spcPts val="500"/>
+                <a:spcPts val="300"/>
               </a:spcBef>
               <a:spcAft>
                 <a:spcPts val="0"/>
@@ -31878,10 +32109,10 @@
           <a:p>
             <a:pPr marL="0" marR="0" lvl="0" indent="0" algn="l" rtl="0">
               <a:lnSpc>
-                <a:spcPct val="110000"/>
+                <a:spcPct val="108000"/>
               </a:lnSpc>
               <a:spcBef>
-                <a:spcPts val="500"/>
+                <a:spcPts val="300"/>
               </a:spcBef>
               <a:spcAft>
                 <a:spcPts val="0"/>
@@ -31898,6 +32129,44 @@
                 <a:cs typeface="Instrument Sans"/>
                 <a:sym typeface="Instrument Sans"/>
               </a:rPr>
+              <a:t>Handshake: </a:t>
+            </a:r>
+            <a:r>
+              <a:rPr lang="en-US" sz="850" b="0" i="0" u="none" strike="noStrike" cap="none">
+                <a:solidFill>
+                  <a:srgbClr val="33322F"/>
+                </a:solidFill>
+                <a:latin typeface="Instrument Sans"/>
+                <a:ea typeface="Instrument Sans"/>
+                <a:cs typeface="Instrument Sans"/>
+                <a:sym typeface="Instrument Sans"/>
+              </a:rPr>
+              <a:t>AI-training business at nearly $1B gross run-rate (The Information, Apr 2026)</a:t>
+            </a:r>
+          </a:p>
+          <a:p>
+            <a:pPr marL="0" marR="0" lvl="0" indent="0" algn="l" rtl="0">
+              <a:lnSpc>
+                <a:spcPct val="108000"/>
+              </a:lnSpc>
+              <a:spcBef>
+                <a:spcPts val="300"/>
+              </a:spcBef>
+              <a:spcAft>
+                <a:spcPts val="0"/>
+              </a:spcAft>
+              <a:buNone/>
+            </a:pPr>
+            <a:r>
+              <a:rPr lang="en-US" sz="850" b="1" i="0" u="none" strike="noStrike" cap="none">
+                <a:solidFill>
+                  <a:srgbClr val="111110"/>
+                </a:solidFill>
+                <a:latin typeface="Instrument Sans"/>
+                <a:ea typeface="Instrument Sans"/>
+                <a:cs typeface="Instrument Sans"/>
+                <a:sym typeface="Instrument Sans"/>
+              </a:rPr>
               <a:t>Snorkel AI: </a:t>
             </a:r>
             <a:r>
@@ -31910,16 +32179,16 @@
                 <a:cs typeface="Instrument Sans"/>
                 <a:sym typeface="Instrument Sans"/>
               </a:rPr>
-              <a:t>Company and TechCrunch, Sep 22, 2026 ($350M raised at a $3.5B valuation; $375M run-rate, up 18x in a year)</a:t>
+              <a:t>Reuters and TechCrunch, Sep 22, 2026 ($350M raised at a $3.5B valuation; $375M run-rate, up ~18x in a year)</a:t>
             </a:r>
           </a:p>
           <a:p>
             <a:pPr marL="0" marR="0" lvl="0" indent="0" algn="l" rtl="0">
               <a:lnSpc>
-                <a:spcPct val="110000"/>
+                <a:spcPct val="108000"/>
               </a:lnSpc>
               <a:spcBef>
-                <a:spcPts val="500"/>
+                <a:spcPts val="300"/>
               </a:spcBef>
               <a:spcAft>
                 <a:spcPts val="0"/>
@@ -31948,16 +32217,16 @@
                 <a:cs typeface="Instrument Sans"/>
                 <a:sym typeface="Instrument Sans"/>
               </a:rPr>
-              <a:t>Founded Feb 2025; Forbes, Sep 1, 2026 (18 months after YC, $3.2B valuation); Business Wire (Apr 2026, Series A at $300M, $100M run-rate); YC profile (co-founder interned at Citadel Securities)</a:t>
+              <a:t>Founded Feb 2025; Business Wire (Apr 2026, Series A at $300M, $100M run-rate); Forbes and TechCrunch (Sep 1, 2026, reported $3.2B valuation; founders are high-school friends, now 22 and 23); YC profile (co-founder interned at Citadel Securities)</a:t>
             </a:r>
           </a:p>
           <a:p>
             <a:pPr marL="0" marR="0" lvl="0" indent="0" algn="l" rtl="0">
               <a:lnSpc>
-                <a:spcPct val="110000"/>
+                <a:spcPct val="108000"/>
               </a:lnSpc>
               <a:spcBef>
-                <a:spcPts val="500"/>
+                <a:spcPts val="300"/>
               </a:spcBef>
               <a:spcAft>
                 <a:spcPts val="0"/>
@@ -31986,16 +32255,16 @@
                 <a:cs typeface="Instrument Sans"/>
                 <a:sym typeface="Instrument Sans"/>
               </a:rPr>
-              <a:t>Founded in 2016 by Alexandr Wang, then 19 (Forbes); Meta bought 49% for $14.3B, ~$29B valuation (Reuters, Jun 2025); nearly half of new training projects involve RL environments (Scale AI blog, Feb 2026)</a:t>
+              <a:t>Founded in 2016 by Alexandr Wang, then 19 (Forbes); Meta bought 49% for $14.3B, ~$29B valuation (Reuters, Jun 2025)</a:t>
             </a:r>
           </a:p>
           <a:p>
             <a:pPr marL="0" marR="0" lvl="0" indent="0" algn="l" rtl="0">
               <a:lnSpc>
-                <a:spcPct val="110000"/>
+                <a:spcPct val="108000"/>
               </a:lnSpc>
               <a:spcBef>
-                <a:spcPts val="500"/>
+                <a:spcPts val="300"/>
               </a:spcBef>
               <a:spcAft>
                 <a:spcPts val="0"/>
@@ -32012,6 +32281,44 @@
                 <a:cs typeface="Instrument Sans"/>
                 <a:sym typeface="Instrument Sans"/>
               </a:rPr>
+              <a:t>Mechanize: </a:t>
+            </a:r>
+            <a:r>
+              <a:rPr lang="en-US" sz="850" b="0" i="0" u="none" strike="noStrike" cap="none">
+                <a:solidFill>
+                  <a:srgbClr val="33322F"/>
+                </a:solidFill>
+                <a:latin typeface="Instrument Sans"/>
+                <a:ea typeface="Instrument Sans"/>
+                <a:cs typeface="Instrument Sans"/>
+                <a:sym typeface="Instrument Sans"/>
+              </a:rPr>
+              <a:t>Business Insider (Aug and Sep 2026): Google talent and licensing deal, reportedly over $1.5B</a:t>
+            </a:r>
+          </a:p>
+          <a:p>
+            <a:pPr marL="0" marR="0" lvl="0" indent="0" algn="l" rtl="0">
+              <a:lnSpc>
+                <a:spcPct val="108000"/>
+              </a:lnSpc>
+              <a:spcBef>
+                <a:spcPts val="300"/>
+              </a:spcBef>
+              <a:spcAft>
+                <a:spcPts val="0"/>
+              </a:spcAft>
+              <a:buNone/>
+            </a:pPr>
+            <a:r>
+              <a:rPr lang="en-US" sz="850" b="1" i="0" u="none" strike="noStrike" cap="none">
+                <a:solidFill>
+                  <a:srgbClr val="111110"/>
+                </a:solidFill>
+                <a:latin typeface="Instrument Sans"/>
+                <a:ea typeface="Instrument Sans"/>
+                <a:cs typeface="Instrument Sans"/>
+                <a:sym typeface="Instrument Sans"/>
+              </a:rPr>
               <a:t>UniPat: </a:t>
             </a:r>
             <a:r>
@@ -32024,16 +32331,16 @@
                 <a:cs typeface="Instrument Sans"/>
                 <a:sym typeface="Instrument Sans"/>
               </a:rPr>
-              <a:t>Bloomberg, Sep 10, 2026 (Alibaba-led $300M round, reported $2.5B valuation, with Tencent and HongShan; terms may change; Alibaba, ByteDance, DeepSeek and others buy from UniPat and Humanlaya)</a:t>
+              <a:t>Bloomberg, Sep 10, 2026 (Alibaba set to lead a $300M round at a reported $2.5B valuation, with Tencent and HSG; talks ongoing; Alibaba, ByteDance, DeepSeek and others have bought data or services from UniPat and Humanlaya); 36Kr (Sep 24, 2026)</a:t>
             </a:r>
           </a:p>
           <a:p>
             <a:pPr marL="0" marR="0" lvl="0" indent="0" algn="l" rtl="0">
               <a:lnSpc>
-                <a:spcPct val="110000"/>
+                <a:spcPct val="108000"/>
               </a:lnSpc>
               <a:spcBef>
-                <a:spcPts val="500"/>
+                <a:spcPts val="300"/>
               </a:spcBef>
               <a:spcAft>
                 <a:spcPts val="0"/>
@@ -32062,7 +32369,45 @@
                 <a:cs typeface="Instrument Sans"/>
                 <a:sym typeface="Instrument Sans"/>
               </a:rPr>
-              <a:t>Founded Oct 2025; Pre-A of several hundred million RMB on Sep 9, 2026, led by CDH with HongShan, Capital Today and BAI (Jiemian, Eastmoney)</a:t>
+              <a:t>Founded 2025; Pre-A of several hundred million RMB in Sep 2026, led by CDH with HSG, Capital Today and BAI (Jiemian, Eastmoney)</a:t>
+            </a:r>
+          </a:p>
+          <a:p>
+            <a:pPr marL="0" marR="0" lvl="0" indent="0" algn="l" rtl="0">
+              <a:lnSpc>
+                <a:spcPct val="108000"/>
+              </a:lnSpc>
+              <a:spcBef>
+                <a:spcPts val="300"/>
+              </a:spcBef>
+              <a:spcAft>
+                <a:spcPts val="0"/>
+              </a:spcAft>
+              <a:buNone/>
+            </a:pPr>
+            <a:r>
+              <a:rPr lang="en-US" sz="850" b="1" i="0" u="none" strike="noStrike" cap="none">
+                <a:solidFill>
+                  <a:srgbClr val="111110"/>
+                </a:solidFill>
+                <a:latin typeface="Instrument Sans"/>
+                <a:ea typeface="Instrument Sans"/>
+                <a:cs typeface="Instrument Sans"/>
+                <a:sym typeface="Instrument Sans"/>
+              </a:rPr>
+              <a:t>Apex Intelligence (超衍智能): </a:t>
+            </a:r>
+            <a:r>
+              <a:rPr lang="en-US" sz="850" b="0" i="0" u="none" strike="noStrike" cap="none">
+                <a:solidFill>
+                  <a:srgbClr val="33322F"/>
+                </a:solidFill>
+                <a:latin typeface="Instrument Sans"/>
+                <a:ea typeface="Instrument Sans"/>
+                <a:cs typeface="Instrument Sans"/>
+                <a:sym typeface="Instrument Sans"/>
+              </a:rPr>
+              <a:t>36Kr (Sep 16, 2026): self-improving (RSI) model company; angel and angel+ rounds of nearly RMB 400M, led by IDG Capital, Xinglian Capital and XtalPi</a:t>
             </a:r>
           </a:p>
         </p:txBody>
@@ -32172,7 +32517,7 @@
           <a:p>
             <a:pPr marL="0" marR="0" lvl="0" indent="0" algn="l" rtl="0">
               <a:lnSpc>
-                <a:spcPct val="110000"/>
+                <a:spcPct val="108000"/>
               </a:lnSpc>
               <a:spcBef>
                 <a:spcPts val="0"/>
@@ -32192,7 +32537,7 @@
                 <a:cs typeface="Instrument Sans"/>
                 <a:sym typeface="Instrument Sans"/>
               </a:rPr>
-              <a:t>Training data spend today: </a:t>
+              <a:t>Training-data vendor revenue: </a:t>
             </a:r>
             <a:r>
               <a:rPr lang="en-US" sz="850" b="0" i="0" u="none" strike="noStrike" cap="none">
@@ -32204,16 +32549,16 @@
                 <a:cs typeface="Instrument Sans"/>
                 <a:sym typeface="Instrument Sans"/>
               </a:rPr>
-              <a:t>Menlo Ventures (Jul 2026): 50+ vendors, ~$8.5B combined</a:t>
+              <a:t>Deedy Das, Menlo Ventures partner, AI training-data market map (Jul 2026): 50+ companies, ~$8.5B combined revenue (partly gross)</a:t>
             </a:r>
           </a:p>
           <a:p>
             <a:pPr marL="0" marR="0" lvl="0" indent="0" algn="l" rtl="0">
               <a:lnSpc>
-                <a:spcPct val="110000"/>
+                <a:spcPct val="108000"/>
               </a:lnSpc>
               <a:spcBef>
-                <a:spcPts val="500"/>
+                <a:spcPts val="300"/>
               </a:spcBef>
               <a:spcAft>
                 <a:spcPts val="0"/>
@@ -32242,16 +32587,16 @@
                 <a:cs typeface="Instrument Sans"/>
                 <a:sym typeface="Instrument Sans"/>
               </a:rPr>
-              <a:t>McKinsey, Agents, robots, and us (Nov 2025): US ~$2.9T; IMF WEO (Apr 2026): US GDP $32.4T, world $126.3T; half the US penetration assumed elsewhere</a:t>
+              <a:t>McKinsey, Agents, robots, and us (Nov 2025): US ~$2.9T of unlockable value; IMF WEO (Apr 2026): US GDP $32.4T, world $126.3T; half the US penetration assumed elsewhere</a:t>
             </a:r>
           </a:p>
           <a:p>
             <a:pPr marL="0" marR="0" lvl="0" indent="0" algn="l" rtl="0">
               <a:lnSpc>
-                <a:spcPct val="110000"/>
+                <a:spcPct val="108000"/>
               </a:lnSpc>
               <a:spcBef>
-                <a:spcPts val="500"/>
+                <a:spcPts val="300"/>
               </a:spcBef>
               <a:spcAft>
                 <a:spcPts val="0"/>
@@ -32286,10 +32631,10 @@
           <a:p>
             <a:pPr marL="0" marR="0" lvl="0" indent="0" algn="l" rtl="0">
               <a:lnSpc>
-                <a:spcPct val="110000"/>
+                <a:spcPct val="108000"/>
               </a:lnSpc>
               <a:spcBef>
-                <a:spcPts val="500"/>
+                <a:spcPts val="300"/>
               </a:spcBef>
               <a:spcAft>
                 <a:spcPts val="0"/>
@@ -32306,7 +32651,7 @@
                 <a:cs typeface="Instrument Sans"/>
                 <a:sym typeface="Instrument Sans"/>
               </a:rPr>
-              <a:t>AI agent market: </a:t>
+              <a:t>Agentic commerce: </a:t>
             </a:r>
             <a:r>
               <a:rPr lang="en-US" sz="850" b="0" i="0" u="none" strike="noStrike" cap="none">
@@ -32318,16 +32663,16 @@
                 <a:cs typeface="Instrument Sans"/>
                 <a:sym typeface="Instrument Sans"/>
               </a:rPr>
-              <a:t>Precedence Research ($7.92B in 2025; 45.82% CAGR); 2028 and 2032 extrapolated</a:t>
+              <a:t>McKinsey (Oct 2025): AI agents could handle $3–5T of global consumer commerce by 2030; cited by Ant International, Mastercard and Visa (CNBC, Sep 10, 2026)</a:t>
             </a:r>
           </a:p>
           <a:p>
             <a:pPr marL="0" marR="0" lvl="0" indent="0" algn="l" rtl="0">
               <a:lnSpc>
-                <a:spcPct val="110000"/>
+                <a:spcPct val="108000"/>
               </a:lnSpc>
               <a:spcBef>
-                <a:spcPts val="500"/>
+                <a:spcPts val="300"/>
               </a:spcBef>
               <a:spcAft>
                 <a:spcPts val="0"/>
@@ -32356,16 +32701,16 @@
                 <a:cs typeface="Instrument Sans"/>
                 <a:sym typeface="Instrument Sans"/>
               </a:rPr>
-              <a:t>Epoch AI, An FAQ on RL environments (Jan 2026)</a:t>
+              <a:t>Epoch AI, An FAQ on RL environments (2026)</a:t>
             </a:r>
           </a:p>
           <a:p>
             <a:pPr marL="0" marR="0" lvl="0" indent="0" algn="l" rtl="0">
               <a:lnSpc>
-                <a:spcPct val="110000"/>
+                <a:spcPct val="108000"/>
               </a:lnSpc>
               <a:spcBef>
-                <a:spcPts val="500"/>
+                <a:spcPts val="300"/>
               </a:spcBef>
               <a:spcAft>
                 <a:spcPts val="0"/>
@@ -32400,10 +32745,10 @@
           <a:p>
             <a:pPr marL="0" marR="0" lvl="0" indent="0" algn="l" rtl="0">
               <a:lnSpc>
-                <a:spcPct val="110000"/>
+                <a:spcPct val="108000"/>
               </a:lnSpc>
               <a:spcBef>
-                <a:spcPts val="500"/>
+                <a:spcPts val="300"/>
               </a:spcBef>
               <a:spcAft>
                 <a:spcPts val="0"/>
@@ -32432,16 +32777,16 @@
                 <a:cs typeface="Instrument Sans"/>
                 <a:sym typeface="Instrument Sans"/>
               </a:rPr>
-              <a:t>Applied Compute: Upstarts (Jun 2025, $20M seed at $100M post); The Information (Aug 2026, ~$3B in talks)</a:t>
+              <a:t>Applied Compute: Upstarts (Jun 2025, seed at $100M post); Forbes (Sep 1, 2026, raising $350M at $3.25B)</a:t>
             </a:r>
           </a:p>
           <a:p>
             <a:pPr marL="0" marR="0" lvl="0" indent="0" algn="l" rtl="0">
               <a:lnSpc>
-                <a:spcPct val="110000"/>
+                <a:spcPct val="108000"/>
               </a:lnSpc>
               <a:spcBef>
-                <a:spcPts val="500"/>
+                <a:spcPts val="300"/>
               </a:spcBef>
               <a:spcAft>
                 <a:spcPts val="0"/>
@@ -32470,16 +32815,16 @@
                 <a:cs typeface="Instrument Sans"/>
                 <a:sym typeface="Instrument Sans"/>
               </a:rPr>
-              <a:t>Meta Muse launch (Sep 8, 2026; Axios, CNBC); Bloomberg (Sep 21, 2026): Amazon blocks Muse; OpenAI unveils always-on Dots at DevDay (Sep 29, 2026; TechCrunch, CNBC)</a:t>
+              <a:t>Meta Muse (launched Sep 8, 2026; No. 1 on the US App Store Sep 18; TechCrunch, Business Insider); OpenAI Dots (DevDay, Sep 29, 2026; The Verge, CNBC); Qwen Personal Agent (Apsara, Sep 22, 2026); Manus Cue (Sep 28, 2026; Bloomberg)</a:t>
             </a:r>
           </a:p>
           <a:p>
             <a:pPr marL="0" marR="0" lvl="0" indent="0" algn="l" rtl="0">
               <a:lnSpc>
-                <a:spcPct val="110000"/>
+                <a:spcPct val="108000"/>
               </a:lnSpc>
               <a:spcBef>
-                <a:spcPts val="500"/>
+                <a:spcPts val="300"/>
               </a:spcBef>
               <a:spcAft>
                 <a:spcPts val="0"/>
@@ -32508,16 +32853,16 @@
                 <a:cs typeface="Instrument Sans"/>
                 <a:sym typeface="Instrument Sans"/>
               </a:rPr>
-              <a:t>Business Wire, Sep 28, 2026: $1B Series C at a $10B valuation from Sequoia, Benchmark and Coatue; valued at $2.5B 33 days earlier</a:t>
+              <a:t>Reuters and TechCrunch, Sep 28, 2026: $1B at a $10B valuation from Sequoia, Benchmark and Coatue; valued at $2.5B on Aug 26, 2026; founder Noah Shinn is 23</a:t>
             </a:r>
           </a:p>
           <a:p>
             <a:pPr marL="0" marR="0" lvl="0" indent="0" algn="l" rtl="0">
               <a:lnSpc>
-                <a:spcPct val="110000"/>
+                <a:spcPct val="108000"/>
               </a:lnSpc>
               <a:spcBef>
-                <a:spcPts val="500"/>
+                <a:spcPts val="300"/>
               </a:spcBef>
               <a:spcAft>
                 <a:spcPts val="0"/>
@@ -32547,6 +32892,44 @@
                 <a:sym typeface="Instrument Sans"/>
               </a:rPr>
               <a:t>Scale AI and CAIS, Jul 2026: the best model completes 16.1% of real freelance projects to a paying client’s standard</a:t>
+            </a:r>
+          </a:p>
+          <a:p>
+            <a:pPr marL="0" marR="0" lvl="0" indent="0" algn="l" rtl="0">
+              <a:lnSpc>
+                <a:spcPct val="108000"/>
+              </a:lnSpc>
+              <a:spcBef>
+                <a:spcPts val="300"/>
+              </a:spcBef>
+              <a:spcAft>
+                <a:spcPts val="0"/>
+              </a:spcAft>
+              <a:buNone/>
+            </a:pPr>
+            <a:r>
+              <a:rPr lang="en-US" sz="850" b="1" i="0" u="none" strike="noStrike" cap="none">
+                <a:solidFill>
+                  <a:srgbClr val="111110"/>
+                </a:solidFill>
+                <a:latin typeface="Instrument Sans"/>
+                <a:ea typeface="Instrument Sans"/>
+                <a:cs typeface="Instrument Sans"/>
+                <a:sym typeface="Instrument Sans"/>
+              </a:rPr>
+              <a:t>Event prediction: </a:t>
+            </a:r>
+            <a:r>
+              <a:rPr lang="en-US" sz="850" b="0" i="0" u="none" strike="noStrike" cap="none">
+                <a:solidFill>
+                  <a:srgbClr val="33322F"/>
+                </a:solidFill>
+                <a:latin typeface="Instrument Sans"/>
+                <a:ea typeface="Instrument Sans"/>
+                <a:cs typeface="Instrument Sans"/>
+                <a:sym typeface="Instrument Sans"/>
+              </a:rPr>
+              <a:t>PolyBench (arXiv 2604.14199, Apr 2026): 7 frontier models simulated trading on 38,666 Polymarket markets; only 2 made money</a:t>
             </a:r>
           </a:p>
         </p:txBody>
@@ -33530,7 +33913,7 @@
                 <a:cs typeface="Instrument Sans"/>
                 <a:sym typeface="Instrument Sans"/>
               </a:rPr>
-              <a:t>Recursive self-improvement: AI trains on its own results in real environments, stronger each round</a:t>
+              <a:t>Recursive self-improvement: AI helps build the next, better AI; we turn each round’s real outcomes into the next round’s training data</a:t>
             </a:r>
           </a:p>
         </p:txBody>
@@ -36409,7 +36792,7 @@
                 <a:cs typeface="Newsreader"/>
                 <a:sym typeface="Newsreader"/>
               </a:rPr>
-              <a:t>Mercor grew revenue 27x and valuation 10x within 18 months: </a:t>
+              <a:t>Mercor grew revenue 27x in 16 months and is in talks at $20B: </a:t>
             </a:r>
             <a:r>
               <a:rPr lang="en-US" sz="1600" b="0" i="0" u="none" strike="noStrike" cap="none">
@@ -36857,7 +37240,7 @@
                 <a:cs typeface="IBM Plex Mono"/>
                 <a:sym typeface="IBM Plex Mono"/>
               </a:rPr>
-              <a:t>Demand growth</a:t>
+              <a:t>Agents spending for people</a:t>
             </a:r>
           </a:p>
         </p:txBody>
@@ -36906,7 +37289,7 @@
                 <a:cs typeface="Newsreader"/>
                 <a:sym typeface="Newsreader"/>
               </a:rPr>
-              <a:t>14x</a:t>
+              <a:t>$3–5T</a:t>
             </a:r>
           </a:p>
         </p:txBody>
@@ -36958,7 +37341,7 @@
                 <a:cs typeface="Instrument Sans"/>
                 <a:sym typeface="Instrument Sans"/>
               </a:rPr>
-              <a:t>AI agent market forecast: $7.9B → ~$111B over 7 years</a:t>
+              <a:t>Global consumer commerce AI agents could handle by 2030 (McKinsey)</a:t>
             </a:r>
           </a:p>
         </p:txBody>
@@ -37417,7 +37800,7 @@
                 <a:cs typeface="Newsreader"/>
                 <a:sym typeface="Newsreader"/>
               </a:rPr>
-              <a:t>Nearly half</a:t>
+              <a:t>$1.5B+</a:t>
             </a:r>
           </a:p>
         </p:txBody>
@@ -37466,7 +37849,7 @@
                 <a:cs typeface="Instrument Sans"/>
                 <a:sym typeface="Instrument Sans"/>
               </a:rPr>
-              <a:t>of Scale AI’s new training projects use RL environments</a:t>
+              <a:t>Google’s reported deal with RL-environment startup Mechanize</a:t>
             </a:r>
           </a:p>
         </p:txBody>
@@ -37593,7 +37976,7 @@
                 <a:cs typeface="Instrument Sans"/>
                 <a:sym typeface="Instrument Sans"/>
               </a:rPr>
-              <a:t>AfterQuery valuation: $300M → $3.2B</a:t>
+              <a:t>AfterQuery valuation: $300M → $3.2B (reported)</a:t>
             </a:r>
           </a:p>
         </p:txBody>
@@ -37671,7 +38054,7 @@
                 <a:cs typeface="Newsreader"/>
                 <a:sym typeface="Newsreader"/>
               </a:rPr>
-              <a:t>Before 2032</a:t>
+              <a:t>2026–2032</a:t>
             </a:r>
           </a:p>
         </p:txBody>
@@ -37830,7 +38213,7 @@
                 <a:cs typeface="Instrument Sans"/>
                 <a:sym typeface="Instrument Sans"/>
               </a:rPr>
-              <a:t>Sources: Mercor (TechCrunch, Sacra, Dealroom, Bloomberg); AfterQuery (Business Wire, Forbes); Snorkel AI (company); Scale AI (Reuters, company blog); AI agents (Precedence Research); text stock (Epoch AI). See A2.</a:t>
+              <a:t>Sources: Mercor (TechCrunch, Sacra, Dealroom, Bloomberg, The Information); AfterQuery (Business Wire, Forbes); Snorkel AI (Reuters); Scale AI (Reuters); Mechanize (Business Insider); agentic commerce (McKinsey, via CNBC); text stock (Epoch AI). See A2.</a:t>
             </a:r>
           </a:p>
         </p:txBody>
@@ -39392,7 +39775,7 @@
                 <a:cs typeface="Newsreader"/>
                 <a:sym typeface="Newsreader"/>
               </a:rPr>
-              <a:t>Wrong once the result is in</a:t>
+              <a:t>Bets placed on it lose money</a:t>
             </a:r>
           </a:p>
         </p:txBody>
@@ -41020,7 +41403,7 @@
                 <a:cs typeface="Newsreader"/>
                 <a:sym typeface="Newsreader"/>
               </a:rPr>
-              <a:t>Autonomy and</a:t>
+              <a:t>Self-improvement</a:t>
             </a:r>
           </a:p>
           <a:p>
@@ -41046,7 +41429,7 @@
                 <a:cs typeface="Newsreader"/>
                 <a:sym typeface="Newsreader"/>
               </a:rPr>
-              <a:t>self-improvement</a:t>
+              <a:t>settled by real outcomes</a:t>
             </a:r>
           </a:p>
         </p:txBody>
@@ -41144,7 +41527,7 @@
                 <a:cs typeface="Newsreader"/>
                 <a:sym typeface="Newsreader"/>
               </a:rPr>
-              <a:t>Acing tests isn’t doing the job. AI’s next leap </a:t>
+              <a:t>A perfect test score doesn’t earn trust. AI’s next leap </a:t>
             </a:r>
             <a:r>
               <a:rPr lang="en-US" sz="2100" b="0" i="0" u="none" strike="noStrike" cap="none">
@@ -44307,7 +44690,7 @@
                 <a:cs typeface="Instrument Sans"/>
                 <a:sym typeface="Instrument Sans"/>
               </a:rPr>
-              <a:t>GPT 6</a:t>
+              <a:t>GPT-6</a:t>
             </a:r>
           </a:p>
         </p:txBody>

--- a/SimReal-BP-v29-EN.pptx
+++ b/SimReal-BP-v29-EN.pptx
@@ -6233,7 +6233,7 @@
                 <a:cs typeface="Instrument Sans"/>
                 <a:sym typeface="Instrument Sans"/>
               </a:rPr>
-              <a:t>RMB 40M (paid in USD)</a:t>
+              <a:t>$6M seed</a:t>
             </a:r>
           </a:p>
         </p:txBody>
@@ -18635,7 +18635,7 @@
                 <a:cs typeface="Instrument Sans"/>
                 <a:sym typeface="Instrument Sans"/>
               </a:rPr>
-              <a:t>Per Bloomberg, Alibaba is set to lead a $300M round in UniPat at a $2.5B valuation; Humanlaya closed a CDH-led Pre-A of several hundred million RMB;</a:t>
+              <a:t>Per Bloomberg, Alibaba is set to lead a $300M round in UniPat at a $2.5B valuation; Humanlaya closed a CDH-led pre-Series A reported at $30M+;</a:t>
             </a:r>
             <a:br>
               <a:rPr lang="en-US" sz="1000"/>
@@ -22035,7 +22035,7 @@
                 <a:cs typeface="Newsreader"/>
                 <a:sym typeface="Newsreader"/>
               </a:rPr>
-              <a:t>Raising RMB 40M </a:t>
+              <a:t>Raising $6M </a:t>
             </a:r>
             <a:r>
               <a:rPr lang="en-US" sz="1600" b="0" i="0" u="none" strike="noStrike" cap="none">
@@ -22047,7 +22047,7 @@
                 <a:cs typeface="Newsreader"/>
                 <a:sym typeface="Newsreader"/>
               </a:rPr>
-              <a:t>at RMB 500M post-money</a:t>
+              <a:t>at a $75M post-money valuation</a:t>
             </a:r>
           </a:p>
         </p:txBody>
@@ -22174,7 +22174,7 @@
                 <a:cs typeface="Newsreader"/>
                 <a:sym typeface="Newsreader"/>
               </a:rPr>
-              <a:t>RMB 40M</a:t>
+              <a:t>$6M</a:t>
             </a:r>
           </a:p>
         </p:txBody>
@@ -22223,7 +22223,7 @@
                 <a:cs typeface="Instrument Sans"/>
                 <a:sym typeface="Instrument Sans"/>
               </a:rPr>
-              <a:t>Paid in USD</a:t>
+              <a:t>Seed round</a:t>
             </a:r>
           </a:p>
         </p:txBody>
@@ -22477,7 +22477,7 @@
                 <a:cs typeface="Newsreader"/>
                 <a:sym typeface="Newsreader"/>
               </a:rPr>
-              <a:t>RMB 460M</a:t>
+              <a:t>$69M</a:t>
             </a:r>
           </a:p>
         </p:txBody>
@@ -22604,7 +22604,7 @@
                 <a:cs typeface="Newsreader"/>
                 <a:sym typeface="Newsreader"/>
               </a:rPr>
-              <a:t>RMB 500M</a:t>
+              <a:t>$75M</a:t>
             </a:r>
           </a:p>
         </p:txBody>
@@ -23069,7 +23069,7 @@
                 <a:cs typeface="Newsreader"/>
                 <a:sym typeface="Newsreader"/>
               </a:rPr>
-              <a:t>~RMB 400M</a:t>
+              <a:t>~$60M</a:t>
             </a:r>
           </a:p>
         </p:txBody>
@@ -23675,7 +23675,7 @@
                 <a:cs typeface="Newsreader"/>
                 <a:sym typeface="Newsreader"/>
               </a:rPr>
-              <a:t>HSG, CDH, Capital Today, BAI and IDG are in; Alibaba and Tencent are moving in: </a:t>
+              <a:t>In China, HSG, CDH, Capital Today, BAI and IDG are in; Alibaba and Tencent are moving in: </a:t>
             </a:r>
             <a:r>
               <a:rPr lang="en-US" sz="1600" b="0" i="0" u="none" strike="noStrike" cap="none">
@@ -24312,7 +24312,7 @@
                 <a:cs typeface="IBM Plex Mono"/>
                 <a:sym typeface="IBM Plex Mono"/>
               </a:rPr>
-              <a:t>01  Revenue engine  ·  RMB 20M</a:t>
+              <a:t>01  Revenue engine  ·  $3M</a:t>
             </a:r>
           </a:p>
         </p:txBody>
@@ -24488,7 +24488,7 @@
                 <a:cs typeface="Newsreader"/>
                 <a:sym typeface="Newsreader"/>
               </a:rPr>
-              <a:t>RMB 7M</a:t>
+              <a:t>$1.05M</a:t>
             </a:r>
           </a:p>
         </p:txBody>
@@ -24664,7 +24664,7 @@
                 <a:cs typeface="Newsreader"/>
                 <a:sym typeface="Newsreader"/>
               </a:rPr>
-              <a:t>RMB 4M</a:t>
+              <a:t>$600K</a:t>
             </a:r>
           </a:p>
         </p:txBody>
@@ -24840,7 +24840,7 @@
                 <a:cs typeface="Newsreader"/>
                 <a:sym typeface="Newsreader"/>
               </a:rPr>
-              <a:t>RMB 6M</a:t>
+              <a:t>$900K</a:t>
             </a:r>
           </a:p>
         </p:txBody>
@@ -25016,7 +25016,7 @@
                 <a:cs typeface="Newsreader"/>
                 <a:sym typeface="Newsreader"/>
               </a:rPr>
-              <a:t>RMB 3M</a:t>
+              <a:t>$450K</a:t>
             </a:r>
           </a:p>
         </p:txBody>
@@ -25688,7 +25688,7 @@
                 <a:cs typeface="IBM Plex Mono"/>
                 <a:sym typeface="IBM Plex Mono"/>
               </a:rPr>
-              <a:t>02  RSI engine  ·  RMB 20M</a:t>
+              <a:t>02  RSI engine  ·  $3M</a:t>
             </a:r>
           </a:p>
         </p:txBody>
@@ -25864,7 +25864,7 @@
                 <a:cs typeface="Newsreader"/>
                 <a:sym typeface="Newsreader"/>
               </a:rPr>
-              <a:t>RMB 9M</a:t>
+              <a:t>$1.35M</a:t>
             </a:r>
           </a:p>
         </p:txBody>
@@ -26040,7 +26040,7 @@
                 <a:cs typeface="Newsreader"/>
                 <a:sym typeface="Newsreader"/>
               </a:rPr>
-              <a:t>RMB 7M</a:t>
+              <a:t>$1.05M</a:t>
             </a:r>
           </a:p>
         </p:txBody>
@@ -26216,7 +26216,7 @@
                 <a:cs typeface="Newsreader"/>
                 <a:sym typeface="Newsreader"/>
               </a:rPr>
-              <a:t>RMB 4M</a:t>
+              <a:t>$600K</a:t>
             </a:r>
           </a:p>
         </p:txBody>
@@ -28919,7 +28919,7 @@
                 <a:cs typeface="Newsreader"/>
                 <a:sym typeface="Newsreader"/>
               </a:rPr>
-              <a:t>RMB 40M</a:t>
+              <a:t>$6M</a:t>
             </a:r>
           </a:p>
         </p:txBody>
@@ -28971,7 +28971,7 @@
                 <a:cs typeface="Instrument Sans"/>
                 <a:sym typeface="Instrument Sans"/>
               </a:rPr>
-              <a:t>Paid in USD; RMB 500M post-money</a:t>
+              <a:t>At a $75M post-money valuation</a:t>
             </a:r>
           </a:p>
           <a:p>
@@ -28997,7 +28997,7 @@
                 <a:cs typeface="Instrument Sans"/>
                 <a:sym typeface="Instrument Sans"/>
               </a:rPr>
-              <a:t>RMB 20M each for the revenue and RSI engines</a:t>
+              <a:t>$3M each for the revenue and RSI engines</a:t>
             </a:r>
           </a:p>
         </p:txBody>
@@ -32369,7 +32369,7 @@
                 <a:cs typeface="Instrument Sans"/>
                 <a:sym typeface="Instrument Sans"/>
               </a:rPr>
-              <a:t>Founded 2025; Pre-A of several hundred million RMB in Sep 2026, led by CDH with HSG, Capital Today and BAI (Jiemian, Eastmoney)</a:t>
+              <a:t>Founded 2025; pre-Series A reported at several hundred million RMB ($30M+) in Sep 2026, led by CDH with HSG, Capital Today and BAI (Jiemian, Eastmoney)</a:t>
             </a:r>
           </a:p>
           <a:p>
@@ -32407,7 +32407,7 @@
                 <a:cs typeface="Instrument Sans"/>
                 <a:sym typeface="Instrument Sans"/>
               </a:rPr>
-              <a:t>36Kr (Sep 16, 2026): self-improving (RSI) model company; angel and angel+ rounds of nearly RMB 400M, led by IDG Capital, Xinglian Capital and XtalPi</a:t>
+              <a:t>36Kr (Sep 16, 2026): self-improving (RSI) model company; angel and angel+ rounds of nearly RMB 400M (~$60M), led by IDG Capital, Xinglian Capital and XtalPi</a:t>
             </a:r>
           </a:p>
         </p:txBody>
@@ -35577,7 +35577,7 @@
                 <a:cs typeface="Instrument Sans"/>
                 <a:sym typeface="Instrument Sans"/>
               </a:rPr>
-              <a:t>Born 2005 · LSE Mathematics · SCIE</a:t>
+              <a:t>Born 2005 · LSE, Math · SCIE (Shenzhen)</a:t>
             </a:r>
           </a:p>
           <a:p>
@@ -35904,7 +35904,7 @@
                 <a:cs typeface="Instrument Sans"/>
                 <a:sym typeface="Instrument Sans"/>
               </a:rPr>
-              <a:t>Born 2005 · Cambridge Math, First (Scholar) · SCIE</a:t>
+              <a:t>Born 2005 · Cambridge Math, First-Class (Scholar)</a:t>
             </a:r>
           </a:p>
           <a:p>
@@ -35956,7 +35956,7 @@
                 <a:cs typeface="Instrument Sans"/>
                 <a:sym typeface="Instrument Sans"/>
               </a:rPr>
-              <a:t>UK Physics Olympiad Super Gold</a:t>
+              <a:t>UK Physics Olympiad Super Gold · SCIE (Shenzhen)</a:t>
             </a:r>
           </a:p>
         </p:txBody>
@@ -36257,7 +36257,33 @@
                 <a:cs typeface="Instrument Sans"/>
                 <a:sym typeface="Instrument Sans"/>
               </a:rPr>
-              <a:t>Born 2005 · Duke Math &amp; Statistics · YK Pao School</a:t>
+              <a:t>Born 2005 · Duke, Math &amp; Statistics</a:t>
+            </a:r>
+          </a:p>
+          <a:p>
+            <a:pPr marL="0" marR="0" lvl="0" indent="0" algn="l" rtl="0">
+              <a:lnSpc>
+                <a:spcPct val="112000"/>
+              </a:lnSpc>
+              <a:spcBef>
+                <a:spcPts val="0"/>
+              </a:spcBef>
+              <a:spcAft>
+                <a:spcPts val="0"/>
+              </a:spcAft>
+              <a:buNone/>
+            </a:pPr>
+            <a:r>
+              <a:rPr lang="en-US" sz="900" b="0" i="0" u="none" strike="noStrike" cap="none">
+                <a:solidFill>
+                  <a:srgbClr val="6E6C66"/>
+                </a:solidFill>
+                <a:latin typeface="Instrument Sans"/>
+                <a:ea typeface="Instrument Sans"/>
+                <a:cs typeface="Instrument Sans"/>
+                <a:sym typeface="Instrument Sans"/>
+              </a:rPr>
+              <a:t>YK Pao School (Shanghai)</a:t>
             </a:r>
           </a:p>
         </p:txBody>
